--- a/関連論文/研究用スライド/せん妄分類研究進捗.pptx
+++ b/関連論文/研究用スライド/せん妄分類研究進捗.pptx
@@ -210,7 +210,7 @@
           <a:p>
             <a:fld id="{D2DF04A8-6A07-4E56-A05D-F312842092A2}" type="datetimeFigureOut">
               <a:rPr kumimoji="1" lang="ja-JP" altLang="en-US" smtClean="0"/>
-              <a:t>2025/11/20</a:t>
+              <a:t>2025/11/21</a:t>
             </a:fld>
             <a:endParaRPr kumimoji="1" lang="ja-JP" altLang="en-US"/>
           </a:p>
@@ -11555,6 +11555,21 @@
             </a:br>
             <a:r>
               <a:rPr lang="ja-JP" altLang="en-US" sz="2000" dirty="0"/>
+              <a:t>患者さん</a:t>
+            </a:r>
+            <a:r>
+              <a:rPr lang="en-US" altLang="ja-JP" sz="2000" dirty="0"/>
+              <a:t>1</a:t>
+            </a:r>
+            <a:r>
+              <a:rPr lang="ja-JP" altLang="en-US" sz="2000" dirty="0"/>
+              <a:t>人につき１０個の結果が得られ、多数決でその患者さんのクラスを決定</a:t>
+            </a:r>
+            <a:br>
+              <a:rPr lang="en-US" altLang="ja-JP" sz="2000" dirty="0"/>
+            </a:br>
+            <a:r>
+              <a:rPr lang="ja-JP" altLang="en-US" sz="2000" dirty="0"/>
               <a:t>すべての患者さんの学習・評価の結果から、感度・特異度を算出</a:t>
             </a:r>
             <a:endParaRPr kumimoji="1" lang="en-US" altLang="ja-JP" dirty="0"/>
@@ -11565,31 +11580,6 @@
               <a:buChar char="•"/>
             </a:pPr>
             <a:endParaRPr kumimoji="1" lang="en-US" altLang="ja-JP" dirty="0"/>
-          </a:p>
-        </p:txBody>
-      </p:sp>
-      <p:sp>
-        <p:nvSpPr>
-          <p:cNvPr id="5" name="コンテンツ プレースホルダー 4">
-            <a:extLst>
-              <a:ext uri="{FF2B5EF4-FFF2-40B4-BE49-F238E27FC236}">
-                <a16:creationId xmlns:a16="http://schemas.microsoft.com/office/drawing/2014/main" id="{FDA48224-8CA1-7BA5-2F4B-0F40ACAEFC34}"/>
-              </a:ext>
-            </a:extLst>
-          </p:cNvPr>
-          <p:cNvSpPr>
-            <a:spLocks noGrp="1"/>
-          </p:cNvSpPr>
-          <p:nvPr>
-            <p:ph sz="quarter" idx="12"/>
-          </p:nvPr>
-        </p:nvSpPr>
-        <p:spPr/>
-        <p:txBody>
-          <a:bodyPr/>
-          <a:lstStyle/>
-          <a:p>
-            <a:endParaRPr kumimoji="1" lang="ja-JP" altLang="en-US"/>
           </a:p>
         </p:txBody>
       </p:sp>
@@ -12900,7 +12890,7 @@
             </a:r>
             <a:r>
               <a:rPr lang="ja-JP" altLang="en-US" dirty="0"/>
-              <a:t>セットとして学習（閾値の話）</a:t>
+              <a:t>セットとして学習</a:t>
             </a:r>
             <a:br>
               <a:rPr lang="en-US" altLang="ja-JP" dirty="0"/>

--- a/関連論文/研究用スライド/せん妄分類研究進捗.pptx
+++ b/関連論文/研究用スライド/せん妄分類研究進捗.pptx
@@ -6,7 +6,7 @@
     <p:sldMasterId id="2147483681" r:id="rId2"/>
   </p:sldMasterIdLst>
   <p:notesMasterIdLst>
-    <p:notesMasterId r:id="rId16"/>
+    <p:notesMasterId r:id="rId17"/>
   </p:notesMasterIdLst>
   <p:sldIdLst>
     <p:sldId id="270" r:id="rId3"/>
@@ -20,8 +20,9 @@
     <p:sldId id="273" r:id="rId11"/>
     <p:sldId id="274" r:id="rId12"/>
     <p:sldId id="275" r:id="rId13"/>
-    <p:sldId id="282" r:id="rId14"/>
-    <p:sldId id="283" r:id="rId15"/>
+    <p:sldId id="284" r:id="rId14"/>
+    <p:sldId id="285" r:id="rId15"/>
+    <p:sldId id="286" r:id="rId16"/>
   </p:sldIdLst>
   <p:sldSz cx="12192000" cy="6858000"/>
   <p:notesSz cx="6858000" cy="9144000"/>
@@ -210,7 +211,7 @@
           <a:p>
             <a:fld id="{D2DF04A8-6A07-4E56-A05D-F312842092A2}" type="datetimeFigureOut">
               <a:rPr kumimoji="1" lang="ja-JP" altLang="en-US" smtClean="0"/>
-              <a:t>2025/11/21</a:t>
+              <a:t>2026/1/22</a:t>
             </a:fld>
             <a:endParaRPr kumimoji="1" lang="ja-JP" altLang="en-US"/>
           </a:p>
@@ -781,6 +782,90 @@
     <p:extLst>
       <p:ext uri="{BB962C8B-B14F-4D97-AF65-F5344CB8AC3E}">
         <p14:creationId xmlns:p14="http://schemas.microsoft.com/office/powerpoint/2010/main" val="3319695143"/>
+      </p:ext>
+    </p:extLst>
+  </p:cSld>
+  <p:clrMapOvr>
+    <a:masterClrMapping/>
+  </p:clrMapOvr>
+</p:notes>
+</file>
+
+<file path=ppt/notesSlides/notesSlide4.xml><?xml version="1.0" encoding="utf-8"?>
+<p:notes xmlns:a="http://schemas.openxmlformats.org/drawingml/2006/main" xmlns:r="http://schemas.openxmlformats.org/officeDocument/2006/relationships" xmlns:p="http://schemas.openxmlformats.org/presentationml/2006/main">
+  <p:cSld>
+    <p:spTree>
+      <p:nvGrpSpPr>
+        <p:cNvPr id="1" name=""/>
+        <p:cNvGrpSpPr/>
+        <p:nvPr/>
+      </p:nvGrpSpPr>
+      <p:grpSpPr>
+        <a:xfrm>
+          <a:off x="0" y="0"/>
+          <a:ext cx="0" cy="0"/>
+          <a:chOff x="0" y="0"/>
+          <a:chExt cx="0" cy="0"/>
+        </a:xfrm>
+      </p:grpSpPr>
+      <p:sp>
+        <p:nvSpPr>
+          <p:cNvPr id="2" name="スライド イメージ プレースホルダー 1"/>
+          <p:cNvSpPr>
+            <a:spLocks noGrp="1" noRot="1" noChangeAspect="1"/>
+          </p:cNvSpPr>
+          <p:nvPr>
+            <p:ph type="sldImg"/>
+          </p:nvPr>
+        </p:nvSpPr>
+        <p:spPr/>
+      </p:sp>
+      <p:sp>
+        <p:nvSpPr>
+          <p:cNvPr id="3" name="ノート プレースホルダー 2"/>
+          <p:cNvSpPr>
+            <a:spLocks noGrp="1"/>
+          </p:cNvSpPr>
+          <p:nvPr>
+            <p:ph type="body" idx="1"/>
+          </p:nvPr>
+        </p:nvSpPr>
+        <p:spPr/>
+        <p:txBody>
+          <a:bodyPr/>
+          <a:lstStyle/>
+          <a:p>
+            <a:endParaRPr kumimoji="1" lang="ja-JP" altLang="en-US" dirty="0"/>
+          </a:p>
+        </p:txBody>
+      </p:sp>
+      <p:sp>
+        <p:nvSpPr>
+          <p:cNvPr id="4" name="スライド番号プレースホルダー 3"/>
+          <p:cNvSpPr>
+            <a:spLocks noGrp="1"/>
+          </p:cNvSpPr>
+          <p:nvPr>
+            <p:ph type="sldNum" sz="quarter" idx="5"/>
+          </p:nvPr>
+        </p:nvSpPr>
+        <p:spPr/>
+        <p:txBody>
+          <a:bodyPr/>
+          <a:lstStyle/>
+          <a:p>
+            <a:fld id="{A6E8DC1D-15BF-4F49-BDAB-B97984E719AB}" type="slidenum">
+              <a:rPr kumimoji="1" lang="ja-JP" altLang="en-US" smtClean="0"/>
+              <a:t>14</a:t>
+            </a:fld>
+            <a:endParaRPr kumimoji="1" lang="ja-JP" altLang="en-US"/>
+          </a:p>
+        </p:txBody>
+      </p:sp>
+    </p:spTree>
+    <p:extLst>
+      <p:ext uri="{BB962C8B-B14F-4D97-AF65-F5344CB8AC3E}">
+        <p14:creationId xmlns:p14="http://schemas.microsoft.com/office/powerpoint/2010/main" val="3957127728"/>
       </p:ext>
     </p:extLst>
   </p:cSld>
@@ -9239,13 +9324,7 @@
   <p:cSld>
     <p:spTree>
       <p:nvGrpSpPr>
-        <p:cNvPr id="1" name="">
-          <a:extLst>
-            <a:ext uri="{FF2B5EF4-FFF2-40B4-BE49-F238E27FC236}">
-              <a16:creationId xmlns:a16="http://schemas.microsoft.com/office/drawing/2014/main" id="{ADACC01E-7D59-4908-CEE5-764645FFF660}"/>
-            </a:ext>
-          </a:extLst>
-        </p:cNvPr>
+        <p:cNvPr id="1" name=""/>
         <p:cNvGrpSpPr/>
         <p:nvPr/>
       </p:nvGrpSpPr>
@@ -9262,7 +9341,7 @@
           <p:cNvPr id="2" name="タイトル 1">
             <a:extLst>
               <a:ext uri="{FF2B5EF4-FFF2-40B4-BE49-F238E27FC236}">
-                <a16:creationId xmlns:a16="http://schemas.microsoft.com/office/drawing/2014/main" id="{EA45ED6F-5EA9-3F09-B3B4-40128A170D95}"/>
+                <a16:creationId xmlns:a16="http://schemas.microsoft.com/office/drawing/2014/main" id="{EE69CF9A-2F7E-572A-2AA1-EAD89A288A14}"/>
               </a:ext>
             </a:extLst>
           </p:cNvPr>
@@ -9279,18 +9358,19 @@
           <a:lstStyle/>
           <a:p>
             <a:r>
-              <a:rPr kumimoji="1" lang="ja-JP" altLang="en-US" dirty="0"/>
-              <a:t>一連のプロセス</a:t>
-            </a:r>
+              <a:rPr lang="ja-JP" altLang="en-US" dirty="0"/>
+              <a:t>新データセットの作成（表情版）</a:t>
+            </a:r>
+            <a:endParaRPr kumimoji="1" lang="ja-JP" altLang="en-US" dirty="0"/>
           </a:p>
         </p:txBody>
       </p:sp>
       <p:sp>
         <p:nvSpPr>
-          <p:cNvPr id="3" name="テキスト プレースホルダー 2">
+          <p:cNvPr id="4" name="コンテンツ プレースホルダー 3">
             <a:extLst>
               <a:ext uri="{FF2B5EF4-FFF2-40B4-BE49-F238E27FC236}">
-                <a16:creationId xmlns:a16="http://schemas.microsoft.com/office/drawing/2014/main" id="{9BB31773-D50B-C9D5-2D84-64634695C335}"/>
+                <a16:creationId xmlns:a16="http://schemas.microsoft.com/office/drawing/2014/main" id="{2B679BDA-9C94-7BFA-D4E6-3B67346EDBF1}"/>
               </a:ext>
             </a:extLst>
           </p:cNvPr>
@@ -9298,13 +9378,13 @@
             <a:spLocks noGrp="1"/>
           </p:cNvSpPr>
           <p:nvPr>
-            <p:ph type="body" sz="quarter" idx="10"/>
+            <p:ph sz="quarter" idx="13"/>
           </p:nvPr>
         </p:nvSpPr>
         <p:spPr>
           <a:xfrm>
-            <a:off x="1097493" y="1039092"/>
-            <a:ext cx="10654238" cy="5818908"/>
+            <a:off x="1096963" y="1160464"/>
+            <a:ext cx="10654238" cy="2393228"/>
           </a:xfrm>
         </p:spPr>
         <p:txBody>
@@ -9314,1433 +9394,598 @@
             <a:pPr marL="342900" indent="-342900">
               <a:buFont typeface="Wingdings" panose="05000000000000000000" pitchFamily="2" charset="2"/>
               <a:buChar char="Ø"/>
+              <a:tabLst>
+                <a:tab pos="446088" algn="l"/>
+              </a:tabLst>
             </a:pPr>
             <a:r>
+              <a:rPr lang="en-US" altLang="ja-JP" dirty="0" err="1"/>
+              <a:t>Pyfeat</a:t>
+            </a:r>
+            <a:r>
               <a:rPr lang="ja-JP" altLang="en-US" dirty="0"/>
-              <a:t>処理概要</a:t>
-            </a:r>
-            <a:endParaRPr lang="en-US" altLang="ja-JP" dirty="0"/>
-          </a:p>
-          <a:p>
-            <a:pPr marL="520700" lvl="1" indent="-342900">
-              <a:buFont typeface="Arial" panose="020B0604020202020204" pitchFamily="34" charset="0"/>
-              <a:buChar char="•"/>
-            </a:pPr>
-            <a:r>
-              <a:rPr lang="ja-JP" altLang="en-US" sz="2000" dirty="0"/>
-              <a:t>右図の黒枠が主に実施している研究</a:t>
-            </a:r>
-            <a:endParaRPr lang="en-US" altLang="ja-JP" sz="2000" dirty="0"/>
-          </a:p>
-          <a:p>
-            <a:pPr marL="520700" lvl="1" indent="-342900">
-              <a:buFont typeface="Arial" panose="020B0604020202020204" pitchFamily="34" charset="0"/>
-              <a:buChar char="•"/>
-            </a:pPr>
-            <a:endParaRPr lang="en-US" altLang="ja-JP" sz="2000" dirty="0"/>
-          </a:p>
-          <a:p>
-            <a:pPr marL="520700" lvl="1" indent="-342900">
-              <a:buFont typeface="Arial" panose="020B0604020202020204" pitchFamily="34" charset="0"/>
-              <a:buChar char="•"/>
-            </a:pPr>
-            <a:r>
-              <a:rPr lang="ja-JP" altLang="en-US" sz="2000" dirty="0"/>
-              <a:t>分類モデル精度向上を目指す</a:t>
-            </a:r>
-            <a:endParaRPr lang="en-US" altLang="ja-JP" sz="2000" dirty="0"/>
-          </a:p>
-          <a:p>
-            <a:pPr marL="520700" lvl="1" indent="-342900">
-              <a:buFont typeface="Arial" panose="020B0604020202020204" pitchFamily="34" charset="0"/>
-              <a:buChar char="•"/>
-            </a:pPr>
-            <a:endParaRPr lang="en-US" altLang="ja-JP" sz="2000" dirty="0"/>
-          </a:p>
-          <a:p>
-            <a:pPr marL="520700" lvl="1" indent="-342900">
-              <a:buFont typeface="Arial" panose="020B0604020202020204" pitchFamily="34" charset="0"/>
-              <a:buChar char="•"/>
-            </a:pPr>
-            <a:endParaRPr lang="ja-JP" altLang="en-US" sz="2000" dirty="0"/>
-          </a:p>
-          <a:p>
-            <a:pPr lvl="1"/>
-            <a:endParaRPr lang="en-US" altLang="ja-JP" dirty="0"/>
-          </a:p>
-          <a:p>
+              <a:t>で取得可能な顔検出信頼度（</a:t>
+            </a:r>
+            <a:r>
+              <a:rPr lang="en-US" altLang="ja-JP" dirty="0"/>
+              <a:t>Confidence</a:t>
+            </a:r>
+            <a:r>
+              <a:rPr lang="ja-JP" altLang="en-US" dirty="0"/>
+              <a:t>値）に制約を追加して</a:t>
+            </a:r>
             <a:br>
               <a:rPr lang="en-US" altLang="ja-JP" dirty="0"/>
             </a:br>
-            <a:br>
-              <a:rPr lang="en-US" altLang="ja-JP" dirty="0"/>
-            </a:br>
-            <a:br>
-              <a:rPr lang="en-US" altLang="ja-JP" sz="2000" dirty="0"/>
-            </a:br>
-            <a:endParaRPr lang="en-US" altLang="ja-JP" sz="2000" dirty="0"/>
-          </a:p>
-          <a:p>
-            <a:pPr marL="520700" lvl="1" indent="-342900">
+            <a:r>
+              <a:rPr lang="ja-JP" altLang="en-US" dirty="0"/>
+              <a:t>新データセットを作成</a:t>
+            </a:r>
+            <a:endParaRPr lang="en-US" altLang="ja-JP" dirty="0"/>
+          </a:p>
+          <a:p>
+            <a:pPr marL="877888" lvl="2" indent="-342900">
               <a:buFont typeface="Arial" panose="020B0604020202020204" pitchFamily="34" charset="0"/>
               <a:buChar char="•"/>
+              <a:tabLst>
+                <a:tab pos="446088" algn="l"/>
+              </a:tabLst>
+            </a:pPr>
+            <a:r>
+              <a:rPr lang="en-US" altLang="ja-JP" sz="2000" dirty="0"/>
+              <a:t>Confidence</a:t>
+            </a:r>
+            <a:r>
+              <a:rPr lang="ja-JP" altLang="en-US" sz="2000" dirty="0"/>
+              <a:t>＜</a:t>
+            </a:r>
+            <a:r>
+              <a:rPr lang="en-US" altLang="ja-JP" sz="2000" dirty="0"/>
+              <a:t>0.95</a:t>
+            </a:r>
+            <a:r>
+              <a:rPr lang="ja-JP" altLang="en-US" sz="2000" dirty="0"/>
+              <a:t>のデータを削除、患者さんの顔特徴が取得できている部分を抽出（</a:t>
+            </a:r>
+            <a:r>
+              <a:rPr lang="en-US" altLang="ja-JP" sz="1800" dirty="0"/>
+              <a:t>0.95</a:t>
+            </a:r>
+            <a:r>
+              <a:rPr lang="ja-JP" altLang="en-US" sz="1800" dirty="0"/>
+              <a:t>未満のデータの割合を調べ、</a:t>
+            </a:r>
+            <a:r>
+              <a:rPr lang="en-US" altLang="ja-JP" sz="1800" u="sng" dirty="0"/>
+              <a:t>4</a:t>
+            </a:r>
+            <a:r>
+              <a:rPr lang="ja-JP" altLang="en-US" sz="1800" u="sng" dirty="0"/>
+              <a:t>割以上を占める患者さんのデータは使用しない</a:t>
+            </a:r>
+            <a:r>
+              <a:rPr lang="ja-JP" altLang="en-US" sz="1800" dirty="0"/>
+              <a:t>）</a:t>
+            </a:r>
+            <a:endParaRPr lang="en-US" altLang="ja-JP" sz="2000" dirty="0"/>
+          </a:p>
+          <a:p>
+            <a:pPr marL="877888" lvl="2" indent="-342900">
+              <a:buFont typeface="Arial" panose="020B0604020202020204" pitchFamily="34" charset="0"/>
+              <a:buChar char="•"/>
+              <a:tabLst>
+                <a:tab pos="446088" algn="l"/>
+              </a:tabLst>
+            </a:pPr>
+            <a:r>
+              <a:rPr lang="ja-JP" altLang="en-US" sz="2000" dirty="0"/>
+              <a:t>データ数：</a:t>
+            </a:r>
+            <a:r>
+              <a:rPr lang="en-US" altLang="ja-JP" sz="2000" dirty="0"/>
+              <a:t>60</a:t>
+            </a:r>
+            <a:r>
+              <a:rPr lang="ja-JP" altLang="en-US" sz="2000" dirty="0"/>
+              <a:t>名（せん妄患者：</a:t>
+            </a:r>
+            <a:r>
+              <a:rPr lang="en-US" altLang="ja-JP" sz="2000" dirty="0"/>
+              <a:t>29</a:t>
+            </a:r>
+            <a:r>
+              <a:rPr lang="ja-JP" altLang="en-US" sz="2000" dirty="0"/>
+              <a:t>名、非せん妄患者：</a:t>
+            </a:r>
+            <a:r>
+              <a:rPr lang="en-US" altLang="ja-JP" sz="2000" dirty="0"/>
+              <a:t>31</a:t>
+            </a:r>
+            <a:r>
+              <a:rPr lang="ja-JP" altLang="en-US" sz="2000" dirty="0"/>
+              <a:t>名）</a:t>
+            </a:r>
+            <a:endParaRPr lang="en-US" altLang="ja-JP" sz="2000" dirty="0"/>
+          </a:p>
+          <a:p>
+            <a:pPr lvl="2">
+              <a:tabLst>
+                <a:tab pos="446088" algn="l"/>
+              </a:tabLst>
             </a:pPr>
             <a:endParaRPr lang="en-US" altLang="ja-JP" sz="2000" dirty="0"/>
           </a:p>
+          <a:p>
+            <a:pPr lvl="2">
+              <a:tabLst>
+                <a:tab pos="446088" algn="l"/>
+              </a:tabLst>
+            </a:pPr>
+            <a:endParaRPr lang="en-US" altLang="ja-JP" sz="2000" dirty="0"/>
+          </a:p>
+          <a:p>
+            <a:pPr marL="877888" lvl="2" indent="-342900">
+              <a:buFont typeface="Arial" panose="020B0604020202020204" pitchFamily="34" charset="0"/>
+              <a:buChar char="•"/>
+              <a:tabLst>
+                <a:tab pos="446088" algn="l"/>
+              </a:tabLst>
+            </a:pPr>
+            <a:endParaRPr lang="en-US" altLang="ja-JP" sz="2000" dirty="0"/>
+          </a:p>
         </p:txBody>
       </p:sp>
-      <p:grpSp>
-        <p:nvGrpSpPr>
-          <p:cNvPr id="48" name="グループ化 47">
+      <p:graphicFrame>
+        <p:nvGraphicFramePr>
+          <p:cNvPr id="8" name="コンテンツ プレースホルダー 7">
             <a:extLst>
               <a:ext uri="{FF2B5EF4-FFF2-40B4-BE49-F238E27FC236}">
-                <a16:creationId xmlns:a16="http://schemas.microsoft.com/office/drawing/2014/main" id="{EAC5F223-5B40-0528-C20C-8FFC677AD6A6}"/>
+                <a16:creationId xmlns:a16="http://schemas.microsoft.com/office/drawing/2014/main" id="{940D1958-5A48-F0F3-9253-6726A1F68070}"/>
               </a:ext>
             </a:extLst>
           </p:cNvPr>
-          <p:cNvGrpSpPr/>
-          <p:nvPr/>
-        </p:nvGrpSpPr>
-        <p:grpSpPr>
-          <a:xfrm>
-            <a:off x="6424612" y="1541474"/>
-            <a:ext cx="5088402" cy="4965998"/>
-            <a:chOff x="4698607" y="2753037"/>
-            <a:chExt cx="10772453" cy="10513317"/>
-          </a:xfrm>
-        </p:grpSpPr>
-        <p:grpSp>
-          <p:nvGrpSpPr>
-            <p:cNvPr id="20" name="グループ化 19">
-              <a:extLst>
-                <a:ext uri="{FF2B5EF4-FFF2-40B4-BE49-F238E27FC236}">
-                  <a16:creationId xmlns:a16="http://schemas.microsoft.com/office/drawing/2014/main" id="{F49E0E8C-C58C-8BD3-1ED0-38F5DFA588C0}"/>
-                </a:ext>
-              </a:extLst>
-            </p:cNvPr>
-            <p:cNvGrpSpPr/>
-            <p:nvPr/>
-          </p:nvGrpSpPr>
-          <p:grpSpPr>
-            <a:xfrm>
-              <a:off x="4698607" y="2753037"/>
-              <a:ext cx="10772453" cy="10513317"/>
-              <a:chOff x="19113226" y="7045845"/>
-              <a:chExt cx="10772453" cy="10513317"/>
-            </a:xfrm>
-          </p:grpSpPr>
-          <p:sp>
-            <p:nvSpPr>
-              <p:cNvPr id="21" name="矢印: 下 20">
+          <p:cNvGraphicFramePr>
+            <a:graphicFrameLocks noGrp="1"/>
+          </p:cNvGraphicFramePr>
+          <p:nvPr>
+            <p:ph sz="quarter" idx="12"/>
+            <p:extLst>
+              <p:ext uri="{D42A27DB-BD31-4B8C-83A1-F6EECF244321}">
+                <p14:modId xmlns:p14="http://schemas.microsoft.com/office/powerpoint/2010/main" val="1352927782"/>
+              </p:ext>
+            </p:extLst>
+          </p:nvPr>
+        </p:nvGraphicFramePr>
+        <p:xfrm>
+          <a:off x="1500101" y="3979719"/>
+          <a:ext cx="9847962" cy="2143842"/>
+        </p:xfrm>
+        <a:graphic>
+          <a:graphicData uri="http://schemas.openxmlformats.org/drawingml/2006/table">
+            <a:tbl>
+              <a:tblPr firstRow="1" bandRow="1">
+                <a:tableStyleId>{5C22544A-7EE6-4342-B048-85BDC9FD1C3A}</a:tableStyleId>
+              </a:tblPr>
+              <a:tblGrid>
+                <a:gridCol w="3282654">
+                  <a:extLst>
+                    <a:ext uri="{9D8B030D-6E8A-4147-A177-3AD203B41FA5}">
+                      <a16:colId xmlns:a16="http://schemas.microsoft.com/office/drawing/2014/main" val="516624836"/>
+                    </a:ext>
+                  </a:extLst>
+                </a:gridCol>
+                <a:gridCol w="3282654">
+                  <a:extLst>
+                    <a:ext uri="{9D8B030D-6E8A-4147-A177-3AD203B41FA5}">
+                      <a16:colId xmlns:a16="http://schemas.microsoft.com/office/drawing/2014/main" val="2088157615"/>
+                    </a:ext>
+                  </a:extLst>
+                </a:gridCol>
+                <a:gridCol w="3282654">
+                  <a:extLst>
+                    <a:ext uri="{9D8B030D-6E8A-4147-A177-3AD203B41FA5}">
+                      <a16:colId xmlns:a16="http://schemas.microsoft.com/office/drawing/2014/main" val="637782424"/>
+                    </a:ext>
+                  </a:extLst>
+                </a:gridCol>
+              </a:tblGrid>
+              <a:tr h="357307">
+                <a:tc>
+                  <a:txBody>
+                    <a:bodyPr/>
+                    <a:lstStyle/>
+                    <a:p>
+                      <a:pPr algn="ctr"/>
+                      <a:r>
+                        <a:rPr kumimoji="1" lang="ja-JP" altLang="en-US" sz="1600" dirty="0"/>
+                        <a:t>割合</a:t>
+                      </a:r>
+                    </a:p>
+                  </a:txBody>
+                  <a:tcPr marL="84525" marR="84525" marT="42262" marB="42262"/>
+                </a:tc>
+                <a:tc>
+                  <a:txBody>
+                    <a:bodyPr/>
+                    <a:lstStyle/>
+                    <a:p>
+                      <a:pPr algn="ctr"/>
+                      <a:r>
+                        <a:rPr kumimoji="1" lang="ja-JP" altLang="en-US" sz="1600" dirty="0"/>
+                        <a:t>せん妄患者数</a:t>
+                      </a:r>
+                      <a:r>
+                        <a:rPr kumimoji="1" lang="en-US" altLang="ja-JP" sz="1600" dirty="0"/>
+                        <a:t>(</a:t>
+                      </a:r>
+                      <a:r>
+                        <a:rPr kumimoji="1" lang="ja-JP" altLang="en-US" sz="1600" dirty="0"/>
+                        <a:t>名</a:t>
+                      </a:r>
+                      <a:r>
+                        <a:rPr kumimoji="1" lang="en-US" altLang="ja-JP" sz="1600" dirty="0"/>
+                        <a:t>)</a:t>
+                      </a:r>
+                      <a:endParaRPr kumimoji="1" lang="ja-JP" altLang="en-US" sz="1600" dirty="0"/>
+                    </a:p>
+                  </a:txBody>
+                  <a:tcPr marL="84525" marR="84525" marT="42262" marB="42262"/>
+                </a:tc>
+                <a:tc>
+                  <a:txBody>
+                    <a:bodyPr/>
+                    <a:lstStyle/>
+                    <a:p>
+                      <a:pPr algn="ctr"/>
+                      <a:r>
+                        <a:rPr kumimoji="1" lang="ja-JP" altLang="en-US" sz="1600" dirty="0"/>
+                        <a:t>非せん妄患者数（名）</a:t>
+                      </a:r>
+                    </a:p>
+                  </a:txBody>
+                  <a:tcPr marL="84525" marR="84525" marT="42262" marB="42262"/>
+                </a:tc>
                 <a:extLst>
-                  <a:ext uri="{FF2B5EF4-FFF2-40B4-BE49-F238E27FC236}">
-                    <a16:creationId xmlns:a16="http://schemas.microsoft.com/office/drawing/2014/main" id="{9901D887-EE85-4899-DE50-4BB601ECD443}"/>
+                  <a:ext uri="{0D108BD9-81ED-4DB2-BD59-A6C34878D82A}">
+                    <a16:rowId xmlns:a16="http://schemas.microsoft.com/office/drawing/2014/main" val="1174737378"/>
                   </a:ext>
                 </a:extLst>
-              </p:cNvPr>
-              <p:cNvSpPr/>
-              <p:nvPr/>
-            </p:nvSpPr>
-            <p:spPr>
-              <a:xfrm rot="16200000">
-                <a:off x="24307336" y="12138864"/>
-                <a:ext cx="417484" cy="2671413"/>
-              </a:xfrm>
-              <a:prstGeom prst="downArrow">
-                <a:avLst/>
-              </a:prstGeom>
-              <a:solidFill>
-                <a:schemeClr val="bg1">
-                  <a:lumMod val="50000"/>
-                </a:schemeClr>
-              </a:solidFill>
-            </p:spPr>
-            <p:style>
-              <a:lnRef idx="1">
-                <a:schemeClr val="dk1"/>
-              </a:lnRef>
-              <a:fillRef idx="2">
-                <a:schemeClr val="dk1"/>
-              </a:fillRef>
-              <a:effectRef idx="1">
-                <a:schemeClr val="dk1"/>
-              </a:effectRef>
-              <a:fontRef idx="minor">
-                <a:schemeClr val="dk1"/>
-              </a:fontRef>
-            </p:style>
-            <p:txBody>
-              <a:bodyPr rtlCol="0" anchor="ctr"/>
-              <a:lstStyle/>
-              <a:p>
-                <a:pPr algn="ctr"/>
-                <a:endParaRPr kumimoji="1" lang="ja-JP" altLang="en-US" sz="1600" dirty="0">
-                  <a:latin typeface="メイリオ" panose="020B0604030504040204" pitchFamily="50" charset="-128"/>
-                  <a:ea typeface="メイリオ" panose="020B0604030504040204" pitchFamily="50" charset="-128"/>
-                </a:endParaRPr>
-              </a:p>
-            </p:txBody>
-          </p:sp>
-          <p:sp>
-            <p:nvSpPr>
-              <p:cNvPr id="22" name="正方形/長方形 21">
+              </a:tr>
+              <a:tr h="357307">
+                <a:tc>
+                  <a:txBody>
+                    <a:bodyPr/>
+                    <a:lstStyle/>
+                    <a:p>
+                      <a:pPr algn="ctr"/>
+                      <a:r>
+                        <a:rPr kumimoji="1" lang="en-US" altLang="ja-JP" sz="1600" dirty="0"/>
+                        <a:t>1</a:t>
+                      </a:r>
+                      <a:r>
+                        <a:rPr kumimoji="1" lang="ja-JP" altLang="en-US" sz="1600" dirty="0"/>
+                        <a:t>割以下</a:t>
+                      </a:r>
+                    </a:p>
+                  </a:txBody>
+                  <a:tcPr marL="84525" marR="84525" marT="42262" marB="42262"/>
+                </a:tc>
+                <a:tc>
+                  <a:txBody>
+                    <a:bodyPr/>
+                    <a:lstStyle/>
+                    <a:p>
+                      <a:pPr algn="ctr"/>
+                      <a:r>
+                        <a:rPr kumimoji="1" lang="en-US" altLang="ja-JP" sz="1600" dirty="0"/>
+                        <a:t>22</a:t>
+                      </a:r>
+                      <a:endParaRPr kumimoji="1" lang="ja-JP" altLang="en-US" sz="1600" dirty="0"/>
+                    </a:p>
+                  </a:txBody>
+                  <a:tcPr marL="84525" marR="84525" marT="42262" marB="42262"/>
+                </a:tc>
+                <a:tc>
+                  <a:txBody>
+                    <a:bodyPr/>
+                    <a:lstStyle/>
+                    <a:p>
+                      <a:pPr algn="ctr"/>
+                      <a:r>
+                        <a:rPr kumimoji="1" lang="en-US" altLang="ja-JP" sz="1600" dirty="0"/>
+                        <a:t>24</a:t>
+                      </a:r>
+                      <a:endParaRPr kumimoji="1" lang="ja-JP" altLang="en-US" sz="1600" dirty="0"/>
+                    </a:p>
+                  </a:txBody>
+                  <a:tcPr marL="84525" marR="84525" marT="42262" marB="42262"/>
+                </a:tc>
                 <a:extLst>
-                  <a:ext uri="{FF2B5EF4-FFF2-40B4-BE49-F238E27FC236}">
-                    <a16:creationId xmlns:a16="http://schemas.microsoft.com/office/drawing/2014/main" id="{D81774E9-B221-E6EE-8CE6-E6A278986BEE}"/>
+                  <a:ext uri="{0D108BD9-81ED-4DB2-BD59-A6C34878D82A}">
+                    <a16:rowId xmlns:a16="http://schemas.microsoft.com/office/drawing/2014/main" val="2582307555"/>
                   </a:ext>
                 </a:extLst>
-              </p:cNvPr>
-              <p:cNvSpPr/>
-              <p:nvPr/>
-            </p:nvSpPr>
-            <p:spPr>
-              <a:xfrm>
-                <a:off x="19113226" y="7045845"/>
-                <a:ext cx="5278714" cy="9889578"/>
-              </a:xfrm>
-              <a:prstGeom prst="rect">
-                <a:avLst/>
-              </a:prstGeom>
-              <a:noFill/>
-            </p:spPr>
-            <p:style>
-              <a:lnRef idx="2">
-                <a:schemeClr val="dk1"/>
-              </a:lnRef>
-              <a:fillRef idx="1">
-                <a:schemeClr val="lt1"/>
-              </a:fillRef>
-              <a:effectRef idx="0">
-                <a:schemeClr val="dk1"/>
-              </a:effectRef>
-              <a:fontRef idx="minor">
-                <a:schemeClr val="dk1"/>
-              </a:fontRef>
-            </p:style>
-            <p:txBody>
-              <a:bodyPr rtlCol="0" anchor="ctr"/>
-              <a:lstStyle/>
-              <a:p>
-                <a:pPr algn="ctr"/>
-                <a:endParaRPr kumimoji="1" lang="ja-JP" altLang="en-US" sz="1600">
-                  <a:latin typeface="メイリオ" panose="020B0604030504040204" pitchFamily="50" charset="-128"/>
-                  <a:ea typeface="メイリオ" panose="020B0604030504040204" pitchFamily="50" charset="-128"/>
-                </a:endParaRPr>
-              </a:p>
-            </p:txBody>
-          </p:sp>
-          <p:sp>
-            <p:nvSpPr>
-              <p:cNvPr id="23" name="テキスト ボックス 22">
+              </a:tr>
+              <a:tr h="357307">
+                <a:tc>
+                  <a:txBody>
+                    <a:bodyPr/>
+                    <a:lstStyle/>
+                    <a:p>
+                      <a:pPr algn="ctr"/>
+                      <a:r>
+                        <a:rPr kumimoji="1" lang="en-US" altLang="ja-JP" sz="1600" dirty="0"/>
+                        <a:t>1-2</a:t>
+                      </a:r>
+                      <a:r>
+                        <a:rPr kumimoji="1" lang="ja-JP" altLang="en-US" sz="1600" dirty="0"/>
+                        <a:t>割</a:t>
+                      </a:r>
+                    </a:p>
+                  </a:txBody>
+                  <a:tcPr marL="84525" marR="84525" marT="42262" marB="42262"/>
+                </a:tc>
+                <a:tc>
+                  <a:txBody>
+                    <a:bodyPr/>
+                    <a:lstStyle/>
+                    <a:p>
+                      <a:pPr algn="ctr"/>
+                      <a:r>
+                        <a:rPr kumimoji="1" lang="en-US" altLang="ja-JP" sz="1600" dirty="0"/>
+                        <a:t>4</a:t>
+                      </a:r>
+                      <a:endParaRPr kumimoji="1" lang="ja-JP" altLang="en-US" sz="1600" dirty="0"/>
+                    </a:p>
+                  </a:txBody>
+                  <a:tcPr marL="84525" marR="84525" marT="42262" marB="42262"/>
+                </a:tc>
+                <a:tc>
+                  <a:txBody>
+                    <a:bodyPr/>
+                    <a:lstStyle/>
+                    <a:p>
+                      <a:pPr algn="ctr"/>
+                      <a:r>
+                        <a:rPr kumimoji="1" lang="en-US" altLang="ja-JP" sz="1600" dirty="0"/>
+                        <a:t>6</a:t>
+                      </a:r>
+                      <a:endParaRPr kumimoji="1" lang="ja-JP" altLang="en-US" sz="1600" dirty="0"/>
+                    </a:p>
+                  </a:txBody>
+                  <a:tcPr marL="84525" marR="84525" marT="42262" marB="42262"/>
+                </a:tc>
                 <a:extLst>
-                  <a:ext uri="{FF2B5EF4-FFF2-40B4-BE49-F238E27FC236}">
-                    <a16:creationId xmlns:a16="http://schemas.microsoft.com/office/drawing/2014/main" id="{E94A569C-EC75-756B-2BB4-6A92442673A2}"/>
+                  <a:ext uri="{0D108BD9-81ED-4DB2-BD59-A6C34878D82A}">
+                    <a16:rowId xmlns:a16="http://schemas.microsoft.com/office/drawing/2014/main" val="862427675"/>
                   </a:ext>
                 </a:extLst>
-              </p:cNvPr>
-              <p:cNvSpPr txBox="1"/>
-              <p:nvPr/>
-            </p:nvSpPr>
-            <p:spPr>
-              <a:xfrm>
-                <a:off x="19731221" y="17001019"/>
-                <a:ext cx="4042723" cy="558143"/>
-              </a:xfrm>
-              <a:prstGeom prst="rect">
-                <a:avLst/>
-              </a:prstGeom>
-              <a:noFill/>
-            </p:spPr>
-            <p:txBody>
-              <a:bodyPr wrap="square" rtlCol="0">
-                <a:spAutoFit/>
-              </a:bodyPr>
-              <a:lstStyle/>
-              <a:p>
-                <a:pPr algn="ctr"/>
-                <a:r>
-                  <a:rPr kumimoji="1" lang="ja-JP" altLang="en-US" sz="1600" b="1" dirty="0">
-                    <a:latin typeface="メイリオ" panose="020B0604030504040204" pitchFamily="50" charset="-128"/>
-                    <a:ea typeface="メイリオ" panose="020B0604030504040204" pitchFamily="50" charset="-128"/>
-                  </a:rPr>
-                  <a:t>オフラインでの</a:t>
-                </a:r>
-                <a:endParaRPr kumimoji="1" lang="en-US" altLang="ja-JP" sz="1600" b="1" dirty="0">
-                  <a:latin typeface="メイリオ" panose="020B0604030504040204" pitchFamily="50" charset="-128"/>
-                  <a:ea typeface="メイリオ" panose="020B0604030504040204" pitchFamily="50" charset="-128"/>
-                </a:endParaRPr>
-              </a:p>
-              <a:p>
-                <a:pPr algn="ctr"/>
-                <a:r>
-                  <a:rPr kumimoji="1" lang="ja-JP" altLang="en-US" sz="1600" b="1" dirty="0">
-                    <a:latin typeface="メイリオ" panose="020B0604030504040204" pitchFamily="50" charset="-128"/>
-                    <a:ea typeface="メイリオ" panose="020B0604030504040204" pitchFamily="50" charset="-128"/>
-                  </a:rPr>
-                  <a:t>分類モデル作成</a:t>
-                </a:r>
-              </a:p>
-            </p:txBody>
-          </p:sp>
-          <p:sp>
-            <p:nvSpPr>
-              <p:cNvPr id="24" name="テキスト ボックス 23">
+              </a:tr>
+              <a:tr h="357307">
+                <a:tc>
+                  <a:txBody>
+                    <a:bodyPr/>
+                    <a:lstStyle/>
+                    <a:p>
+                      <a:pPr algn="ctr"/>
+                      <a:r>
+                        <a:rPr kumimoji="1" lang="en-US" altLang="ja-JP" sz="1600" dirty="0"/>
+                        <a:t>2-3</a:t>
+                      </a:r>
+                      <a:r>
+                        <a:rPr kumimoji="1" lang="ja-JP" altLang="en-US" sz="1600" dirty="0"/>
+                        <a:t>割</a:t>
+                      </a:r>
+                    </a:p>
+                  </a:txBody>
+                  <a:tcPr marL="84525" marR="84525" marT="42262" marB="42262"/>
+                </a:tc>
+                <a:tc>
+                  <a:txBody>
+                    <a:bodyPr/>
+                    <a:lstStyle/>
+                    <a:p>
+                      <a:pPr algn="ctr"/>
+                      <a:r>
+                        <a:rPr kumimoji="1" lang="en-US" altLang="ja-JP" sz="1600" dirty="0"/>
+                        <a:t>2</a:t>
+                      </a:r>
+                      <a:endParaRPr kumimoji="1" lang="ja-JP" altLang="en-US" sz="1600" dirty="0"/>
+                    </a:p>
+                  </a:txBody>
+                  <a:tcPr marL="84525" marR="84525" marT="42262" marB="42262"/>
+                </a:tc>
+                <a:tc>
+                  <a:txBody>
+                    <a:bodyPr/>
+                    <a:lstStyle/>
+                    <a:p>
+                      <a:pPr algn="ctr"/>
+                      <a:r>
+                        <a:rPr kumimoji="1" lang="en-US" altLang="ja-JP" sz="1600" dirty="0"/>
+                        <a:t>1</a:t>
+                      </a:r>
+                      <a:endParaRPr kumimoji="1" lang="ja-JP" altLang="en-US" sz="1600" dirty="0"/>
+                    </a:p>
+                  </a:txBody>
+                  <a:tcPr marL="84525" marR="84525" marT="42262" marB="42262"/>
+                </a:tc>
                 <a:extLst>
-                  <a:ext uri="{FF2B5EF4-FFF2-40B4-BE49-F238E27FC236}">
-                    <a16:creationId xmlns:a16="http://schemas.microsoft.com/office/drawing/2014/main" id="{51F0EC9E-AE26-0829-75CD-B23AB8AFB5EB}"/>
+                  <a:ext uri="{0D108BD9-81ED-4DB2-BD59-A6C34878D82A}">
+                    <a16:rowId xmlns:a16="http://schemas.microsoft.com/office/drawing/2014/main" val="2378117784"/>
                   </a:ext>
                 </a:extLst>
-              </p:cNvPr>
-              <p:cNvSpPr txBox="1"/>
-              <p:nvPr/>
-            </p:nvSpPr>
-            <p:spPr>
-              <a:xfrm>
-                <a:off x="25224960" y="17000156"/>
-                <a:ext cx="4042723" cy="323136"/>
-              </a:xfrm>
-              <a:prstGeom prst="rect">
-                <a:avLst/>
-              </a:prstGeom>
-              <a:noFill/>
-            </p:spPr>
-            <p:txBody>
-              <a:bodyPr wrap="square" rtlCol="0">
-                <a:spAutoFit/>
-              </a:bodyPr>
-              <a:lstStyle/>
-              <a:p>
-                <a:pPr algn="ctr"/>
-                <a:r>
-                  <a:rPr kumimoji="1" lang="ja-JP" altLang="en-US" sz="1600" b="1" dirty="0">
-                    <a:latin typeface="メイリオ" panose="020B0604030504040204" pitchFamily="50" charset="-128"/>
-                    <a:ea typeface="メイリオ" panose="020B0604030504040204" pitchFamily="50" charset="-128"/>
-                  </a:rPr>
-                  <a:t>オンラインでの診断支援</a:t>
-                </a:r>
-              </a:p>
-            </p:txBody>
-          </p:sp>
-          <p:grpSp>
-            <p:nvGrpSpPr>
-              <p:cNvPr id="25" name="グループ化 24">
+              </a:tr>
+              <a:tr h="357307">
+                <a:tc>
+                  <a:txBody>
+                    <a:bodyPr/>
+                    <a:lstStyle/>
+                    <a:p>
+                      <a:pPr algn="ctr"/>
+                      <a:r>
+                        <a:rPr kumimoji="1" lang="en-US" altLang="ja-JP" sz="1600" dirty="0"/>
+                        <a:t>3-4</a:t>
+                      </a:r>
+                      <a:r>
+                        <a:rPr kumimoji="1" lang="ja-JP" altLang="en-US" sz="1600" dirty="0"/>
+                        <a:t>割</a:t>
+                      </a:r>
+                    </a:p>
+                  </a:txBody>
+                  <a:tcPr marL="84525" marR="84525" marT="42262" marB="42262"/>
+                </a:tc>
+                <a:tc>
+                  <a:txBody>
+                    <a:bodyPr/>
+                    <a:lstStyle/>
+                    <a:p>
+                      <a:pPr algn="ctr"/>
+                      <a:r>
+                        <a:rPr kumimoji="1" lang="en-US" altLang="ja-JP" sz="1600" dirty="0"/>
+                        <a:t>1</a:t>
+                      </a:r>
+                      <a:endParaRPr kumimoji="1" lang="ja-JP" altLang="en-US" sz="1600" dirty="0"/>
+                    </a:p>
+                  </a:txBody>
+                  <a:tcPr marL="84525" marR="84525" marT="42262" marB="42262"/>
+                </a:tc>
+                <a:tc>
+                  <a:txBody>
+                    <a:bodyPr/>
+                    <a:lstStyle/>
+                    <a:p>
+                      <a:pPr algn="ctr"/>
+                      <a:r>
+                        <a:rPr kumimoji="1" lang="en-US" altLang="ja-JP" sz="1600" dirty="0"/>
+                        <a:t>0</a:t>
+                      </a:r>
+                      <a:endParaRPr kumimoji="1" lang="ja-JP" altLang="en-US" sz="1600" dirty="0"/>
+                    </a:p>
+                  </a:txBody>
+                  <a:tcPr marL="84525" marR="84525" marT="42262" marB="42262"/>
+                </a:tc>
                 <a:extLst>
-                  <a:ext uri="{FF2B5EF4-FFF2-40B4-BE49-F238E27FC236}">
-                    <a16:creationId xmlns:a16="http://schemas.microsoft.com/office/drawing/2014/main" id="{4823D5AE-C956-DD5C-165C-ED3C17DD5DCA}"/>
+                  <a:ext uri="{0D108BD9-81ED-4DB2-BD59-A6C34878D82A}">
+                    <a16:rowId xmlns:a16="http://schemas.microsoft.com/office/drawing/2014/main" val="3592912490"/>
                   </a:ext>
                 </a:extLst>
-              </p:cNvPr>
-              <p:cNvGrpSpPr/>
-              <p:nvPr/>
-            </p:nvGrpSpPr>
-            <p:grpSpPr>
-              <a:xfrm>
-                <a:off x="19225366" y="7202103"/>
-                <a:ext cx="4224569" cy="9464793"/>
-                <a:chOff x="19579330" y="7054618"/>
-                <a:chExt cx="4224569" cy="9464793"/>
-              </a:xfrm>
-            </p:grpSpPr>
-            <p:sp>
-              <p:nvSpPr>
-                <p:cNvPr id="36" name="正方形/長方形 35">
-                  <a:extLst>
-                    <a:ext uri="{FF2B5EF4-FFF2-40B4-BE49-F238E27FC236}">
-                      <a16:creationId xmlns:a16="http://schemas.microsoft.com/office/drawing/2014/main" id="{1B65634B-5B41-B624-E96E-9AA850964FF2}"/>
-                    </a:ext>
-                  </a:extLst>
-                </p:cNvPr>
-                <p:cNvSpPr/>
-                <p:nvPr/>
-              </p:nvSpPr>
-              <p:spPr>
-                <a:xfrm>
-                  <a:off x="19694118" y="7054618"/>
-                  <a:ext cx="3775587" cy="1321275"/>
-                </a:xfrm>
-                <a:prstGeom prst="rect">
-                  <a:avLst/>
-                </a:prstGeom>
-              </p:spPr>
-              <p:style>
-                <a:lnRef idx="1">
-                  <a:schemeClr val="accent5"/>
-                </a:lnRef>
-                <a:fillRef idx="2">
-                  <a:schemeClr val="accent5"/>
-                </a:fillRef>
-                <a:effectRef idx="1">
-                  <a:schemeClr val="accent5"/>
-                </a:effectRef>
-                <a:fontRef idx="minor">
-                  <a:schemeClr val="dk1"/>
-                </a:fontRef>
-              </p:style>
-              <p:txBody>
-                <a:bodyPr rtlCol="0" anchor="ctr"/>
-                <a:lstStyle/>
-                <a:p>
-                  <a:pPr algn="ctr"/>
-                  <a:r>
-                    <a:rPr kumimoji="1" lang="ja-JP" altLang="en-US" sz="1600" dirty="0">
-                      <a:latin typeface="メイリオ" panose="020B0604030504040204" pitchFamily="50" charset="-128"/>
-                      <a:ea typeface="メイリオ" panose="020B0604030504040204" pitchFamily="50" charset="-128"/>
-                    </a:rPr>
-                    <a:t>多数の患者の</a:t>
-                  </a:r>
-                  <a:br>
-                    <a:rPr kumimoji="1" lang="en-US" altLang="ja-JP" sz="1600" dirty="0">
-                      <a:latin typeface="メイリオ" panose="020B0604030504040204" pitchFamily="50" charset="-128"/>
-                      <a:ea typeface="メイリオ" panose="020B0604030504040204" pitchFamily="50" charset="-128"/>
-                    </a:rPr>
-                  </a:br>
-                  <a:r>
-                    <a:rPr kumimoji="1" lang="ja-JP" altLang="en-US" sz="1600" dirty="0">
-                      <a:latin typeface="メイリオ" panose="020B0604030504040204" pitchFamily="50" charset="-128"/>
-                      <a:ea typeface="メイリオ" panose="020B0604030504040204" pitchFamily="50" charset="-128"/>
-                    </a:rPr>
-                    <a:t>会話場面の収録</a:t>
-                  </a:r>
-                </a:p>
-              </p:txBody>
-            </p:sp>
-            <p:sp>
-              <p:nvSpPr>
-                <p:cNvPr id="37" name="正方形/長方形 36">
-                  <a:extLst>
-                    <a:ext uri="{FF2B5EF4-FFF2-40B4-BE49-F238E27FC236}">
-                      <a16:creationId xmlns:a16="http://schemas.microsoft.com/office/drawing/2014/main" id="{D3DCC2C9-FD5E-912E-1999-5733588B1009}"/>
-                    </a:ext>
-                  </a:extLst>
-                </p:cNvPr>
-                <p:cNvSpPr/>
-                <p:nvPr/>
-              </p:nvSpPr>
-              <p:spPr>
-                <a:xfrm>
-                  <a:off x="19694118" y="9179530"/>
-                  <a:ext cx="3775587" cy="983280"/>
-                </a:xfrm>
-                <a:prstGeom prst="rect">
-                  <a:avLst/>
-                </a:prstGeom>
-              </p:spPr>
-              <p:style>
-                <a:lnRef idx="1">
-                  <a:schemeClr val="accent5"/>
-                </a:lnRef>
-                <a:fillRef idx="2">
-                  <a:schemeClr val="accent5"/>
-                </a:fillRef>
-                <a:effectRef idx="1">
-                  <a:schemeClr val="accent5"/>
-                </a:effectRef>
-                <a:fontRef idx="minor">
-                  <a:schemeClr val="dk1"/>
-                </a:fontRef>
-              </p:style>
-              <p:txBody>
-                <a:bodyPr rtlCol="0" anchor="ctr"/>
-                <a:lstStyle/>
-                <a:p>
-                  <a:pPr algn="ctr"/>
-                  <a:r>
-                    <a:rPr kumimoji="1" lang="ja-JP" altLang="en-US" sz="1600" b="1" dirty="0">
-                      <a:latin typeface="メイリオ" panose="020B0604030504040204" pitchFamily="50" charset="-128"/>
-                      <a:ea typeface="メイリオ" panose="020B0604030504040204" pitchFamily="50" charset="-128"/>
-                    </a:rPr>
-                    <a:t>発話区間の抽出</a:t>
-                  </a:r>
-                </a:p>
-              </p:txBody>
-            </p:sp>
-            <p:sp>
-              <p:nvSpPr>
-                <p:cNvPr id="38" name="正方形/長方形 37">
-                  <a:extLst>
-                    <a:ext uri="{FF2B5EF4-FFF2-40B4-BE49-F238E27FC236}">
-                      <a16:creationId xmlns:a16="http://schemas.microsoft.com/office/drawing/2014/main" id="{B37CEA0E-FA00-DDEC-8861-C39663B5C7DD}"/>
-                    </a:ext>
-                  </a:extLst>
-                </p:cNvPr>
-                <p:cNvSpPr/>
-                <p:nvPr/>
-              </p:nvSpPr>
-              <p:spPr>
-                <a:xfrm>
-                  <a:off x="19687591" y="11067341"/>
-                  <a:ext cx="3775587" cy="983281"/>
-                </a:xfrm>
-                <a:prstGeom prst="rect">
-                  <a:avLst/>
-                </a:prstGeom>
-              </p:spPr>
-              <p:style>
-                <a:lnRef idx="1">
-                  <a:schemeClr val="accent5"/>
-                </a:lnRef>
-                <a:fillRef idx="2">
-                  <a:schemeClr val="accent5"/>
-                </a:fillRef>
-                <a:effectRef idx="1">
-                  <a:schemeClr val="accent5"/>
-                </a:effectRef>
-                <a:fontRef idx="minor">
-                  <a:schemeClr val="dk1"/>
-                </a:fontRef>
-              </p:style>
-              <p:txBody>
-                <a:bodyPr rtlCol="0" anchor="ctr"/>
-                <a:lstStyle/>
-                <a:p>
-                  <a:pPr algn="ctr"/>
-                  <a:r>
-                    <a:rPr kumimoji="1" lang="ja-JP" altLang="en-US" sz="1600" b="1" dirty="0">
-                      <a:latin typeface="メイリオ" panose="020B0604030504040204" pitchFamily="50" charset="-128"/>
-                      <a:ea typeface="メイリオ" panose="020B0604030504040204" pitchFamily="50" charset="-128"/>
-                    </a:rPr>
-                    <a:t>特徴量の抽出</a:t>
-                  </a:r>
-                </a:p>
-              </p:txBody>
-            </p:sp>
-            <p:sp>
-              <p:nvSpPr>
-                <p:cNvPr id="39" name="正方形/長方形 38">
-                  <a:extLst>
-                    <a:ext uri="{FF2B5EF4-FFF2-40B4-BE49-F238E27FC236}">
-                      <a16:creationId xmlns:a16="http://schemas.microsoft.com/office/drawing/2014/main" id="{FC9D7D36-48DD-0541-F4E7-6F497C9DE0BD}"/>
-                    </a:ext>
-                  </a:extLst>
-                </p:cNvPr>
-                <p:cNvSpPr/>
-                <p:nvPr/>
-              </p:nvSpPr>
-              <p:spPr>
-                <a:xfrm>
-                  <a:off x="19694118" y="12918600"/>
-                  <a:ext cx="3775587" cy="949135"/>
-                </a:xfrm>
-                <a:prstGeom prst="rect">
-                  <a:avLst/>
-                </a:prstGeom>
-              </p:spPr>
-              <p:style>
-                <a:lnRef idx="1">
-                  <a:schemeClr val="accent5"/>
-                </a:lnRef>
-                <a:fillRef idx="2">
-                  <a:schemeClr val="accent5"/>
-                </a:fillRef>
-                <a:effectRef idx="1">
-                  <a:schemeClr val="accent5"/>
-                </a:effectRef>
-                <a:fontRef idx="minor">
-                  <a:schemeClr val="dk1"/>
-                </a:fontRef>
-              </p:style>
-              <p:txBody>
-                <a:bodyPr rtlCol="0" anchor="ctr"/>
-                <a:lstStyle/>
-                <a:p>
-                  <a:pPr algn="ctr"/>
-                  <a:r>
-                    <a:rPr kumimoji="1" lang="ja-JP" altLang="en-US" sz="1600" dirty="0">
-                      <a:latin typeface="メイリオ" panose="020B0604030504040204" pitchFamily="50" charset="-128"/>
-                      <a:ea typeface="メイリオ" panose="020B0604030504040204" pitchFamily="50" charset="-128"/>
-                    </a:rPr>
-                    <a:t>分類モデル構築</a:t>
-                  </a:r>
-                </a:p>
-              </p:txBody>
-            </p:sp>
-            <p:sp>
-              <p:nvSpPr>
-                <p:cNvPr id="40" name="矢印: 下 39">
-                  <a:extLst>
-                    <a:ext uri="{FF2B5EF4-FFF2-40B4-BE49-F238E27FC236}">
-                      <a16:creationId xmlns:a16="http://schemas.microsoft.com/office/drawing/2014/main" id="{257CAC56-9819-6301-6E52-115FFBF77D92}"/>
-                    </a:ext>
-                  </a:extLst>
-                </p:cNvPr>
-                <p:cNvSpPr/>
-                <p:nvPr/>
-              </p:nvSpPr>
-              <p:spPr>
-                <a:xfrm>
-                  <a:off x="20055811" y="8258410"/>
-                  <a:ext cx="304144" cy="888859"/>
-                </a:xfrm>
-                <a:prstGeom prst="downArrow">
-                  <a:avLst/>
-                </a:prstGeom>
-              </p:spPr>
-              <p:style>
-                <a:lnRef idx="1">
-                  <a:schemeClr val="dk1"/>
-                </a:lnRef>
-                <a:fillRef idx="2">
-                  <a:schemeClr val="dk1"/>
-                </a:fillRef>
-                <a:effectRef idx="1">
-                  <a:schemeClr val="dk1"/>
-                </a:effectRef>
-                <a:fontRef idx="minor">
-                  <a:schemeClr val="dk1"/>
-                </a:fontRef>
-              </p:style>
-              <p:txBody>
-                <a:bodyPr rtlCol="0" anchor="ctr"/>
-                <a:lstStyle/>
-                <a:p>
-                  <a:pPr algn="ctr"/>
-                  <a:endParaRPr kumimoji="1" lang="ja-JP" altLang="en-US" sz="1600">
-                    <a:latin typeface="メイリオ" panose="020B0604030504040204" pitchFamily="50" charset="-128"/>
-                    <a:ea typeface="メイリオ" panose="020B0604030504040204" pitchFamily="50" charset="-128"/>
-                  </a:endParaRPr>
-                </a:p>
-              </p:txBody>
-            </p:sp>
-            <p:sp>
-              <p:nvSpPr>
-                <p:cNvPr id="41" name="四角形: 角を丸くする 40">
-                  <a:extLst>
-                    <a:ext uri="{FF2B5EF4-FFF2-40B4-BE49-F238E27FC236}">
-                      <a16:creationId xmlns:a16="http://schemas.microsoft.com/office/drawing/2014/main" id="{DD9EA918-D429-87B8-766B-8E6D79FA2E92}"/>
-                    </a:ext>
-                  </a:extLst>
-                </p:cNvPr>
-                <p:cNvSpPr/>
-                <p:nvPr/>
-              </p:nvSpPr>
-              <p:spPr>
-                <a:xfrm>
-                  <a:off x="20371825" y="14230747"/>
-                  <a:ext cx="2810266" cy="830997"/>
-                </a:xfrm>
-                <a:prstGeom prst="roundRect">
-                  <a:avLst/>
-                </a:prstGeom>
-              </p:spPr>
-              <p:style>
-                <a:lnRef idx="3">
-                  <a:schemeClr val="lt1"/>
-                </a:lnRef>
-                <a:fillRef idx="1">
-                  <a:schemeClr val="accent2"/>
-                </a:fillRef>
-                <a:effectRef idx="1">
-                  <a:schemeClr val="accent2"/>
-                </a:effectRef>
-                <a:fontRef idx="minor">
-                  <a:schemeClr val="lt1"/>
-                </a:fontRef>
-              </p:style>
-              <p:txBody>
-                <a:bodyPr rtlCol="0" anchor="ctr"/>
-                <a:lstStyle/>
-                <a:p>
-                  <a:pPr algn="ctr"/>
-                  <a:r>
-                    <a:rPr kumimoji="1" lang="ja-JP" altLang="en-US" sz="1600" dirty="0">
-                      <a:latin typeface="メイリオ" panose="020B0604030504040204" pitchFamily="50" charset="-128"/>
-                      <a:ea typeface="メイリオ" panose="020B0604030504040204" pitchFamily="50" charset="-128"/>
-                    </a:rPr>
-                    <a:t>正解ラベル</a:t>
-                  </a:r>
-                </a:p>
-              </p:txBody>
-            </p:sp>
-            <p:sp>
-              <p:nvSpPr>
-                <p:cNvPr id="42" name="正方形/長方形 41">
-                  <a:extLst>
-                    <a:ext uri="{FF2B5EF4-FFF2-40B4-BE49-F238E27FC236}">
-                      <a16:creationId xmlns:a16="http://schemas.microsoft.com/office/drawing/2014/main" id="{43DC0ABD-06E8-8FD8-9B34-247051FFE7DF}"/>
-                    </a:ext>
-                  </a:extLst>
-                </p:cNvPr>
-                <p:cNvSpPr/>
-                <p:nvPr/>
-              </p:nvSpPr>
-              <p:spPr>
-                <a:xfrm>
-                  <a:off x="19579330" y="9067299"/>
-                  <a:ext cx="4224569" cy="7452112"/>
-                </a:xfrm>
-                <a:prstGeom prst="rect">
-                  <a:avLst/>
-                </a:prstGeom>
-                <a:noFill/>
-                <a:ln w="76200"/>
-              </p:spPr>
-              <p:style>
-                <a:lnRef idx="2">
-                  <a:schemeClr val="accent1">
-                    <a:shade val="15000"/>
-                  </a:schemeClr>
-                </a:lnRef>
-                <a:fillRef idx="1">
-                  <a:schemeClr val="accent1"/>
-                </a:fillRef>
-                <a:effectRef idx="0">
-                  <a:schemeClr val="accent1"/>
-                </a:effectRef>
-                <a:fontRef idx="minor">
-                  <a:schemeClr val="lt1"/>
-                </a:fontRef>
-              </p:style>
-              <p:txBody>
-                <a:bodyPr rtlCol="0" anchor="ctr"/>
-                <a:lstStyle/>
-                <a:p>
-                  <a:pPr algn="ctr"/>
-                  <a:endParaRPr kumimoji="1" lang="ja-JP" altLang="en-US" sz="1600">
-                    <a:latin typeface="メイリオ" panose="020B0604030504040204" pitchFamily="50" charset="-128"/>
-                    <a:ea typeface="メイリオ" panose="020B0604030504040204" pitchFamily="50" charset="-128"/>
-                  </a:endParaRPr>
-                </a:p>
-              </p:txBody>
-            </p:sp>
-            <p:sp>
-              <p:nvSpPr>
-                <p:cNvPr id="43" name="正方形/長方形 42">
-                  <a:extLst>
-                    <a:ext uri="{FF2B5EF4-FFF2-40B4-BE49-F238E27FC236}">
-                      <a16:creationId xmlns:a16="http://schemas.microsoft.com/office/drawing/2014/main" id="{919F0D22-7AF9-BF3B-9B67-0F6C6732DBF3}"/>
-                    </a:ext>
-                  </a:extLst>
-                </p:cNvPr>
-                <p:cNvSpPr/>
-                <p:nvPr/>
-              </p:nvSpPr>
-              <p:spPr>
-                <a:xfrm>
-                  <a:off x="19665842" y="15331539"/>
-                  <a:ext cx="3775587" cy="949135"/>
-                </a:xfrm>
-                <a:prstGeom prst="rect">
-                  <a:avLst/>
-                </a:prstGeom>
-              </p:spPr>
-              <p:style>
-                <a:lnRef idx="1">
-                  <a:schemeClr val="accent5"/>
-                </a:lnRef>
-                <a:fillRef idx="2">
-                  <a:schemeClr val="accent5"/>
-                </a:fillRef>
-                <a:effectRef idx="1">
-                  <a:schemeClr val="accent5"/>
-                </a:effectRef>
-                <a:fontRef idx="minor">
-                  <a:schemeClr val="dk1"/>
-                </a:fontRef>
-              </p:style>
-              <p:txBody>
-                <a:bodyPr rtlCol="0" anchor="ctr"/>
-                <a:lstStyle/>
-                <a:p>
-                  <a:pPr algn="ctr"/>
-                  <a:r>
-                    <a:rPr kumimoji="1" lang="ja-JP" altLang="en-US" sz="1600" dirty="0">
-                      <a:latin typeface="メイリオ" panose="020B0604030504040204" pitchFamily="50" charset="-128"/>
-                      <a:ea typeface="メイリオ" panose="020B0604030504040204" pitchFamily="50" charset="-128"/>
-                    </a:rPr>
-                    <a:t>患者情報の収集</a:t>
-                  </a:r>
-                </a:p>
-              </p:txBody>
-            </p:sp>
-            <p:sp>
-              <p:nvSpPr>
-                <p:cNvPr id="44" name="矢印: 下 43">
-                  <a:extLst>
-                    <a:ext uri="{FF2B5EF4-FFF2-40B4-BE49-F238E27FC236}">
-                      <a16:creationId xmlns:a16="http://schemas.microsoft.com/office/drawing/2014/main" id="{EF9DF967-5A11-D878-893C-FF3A25E88E9A}"/>
-                    </a:ext>
-                  </a:extLst>
-                </p:cNvPr>
-                <p:cNvSpPr/>
-                <p:nvPr/>
-              </p:nvSpPr>
-              <p:spPr>
-                <a:xfrm>
-                  <a:off x="20055811" y="10155725"/>
-                  <a:ext cx="304144" cy="888859"/>
-                </a:xfrm>
-                <a:prstGeom prst="downArrow">
-                  <a:avLst/>
-                </a:prstGeom>
-              </p:spPr>
-              <p:style>
-                <a:lnRef idx="1">
-                  <a:schemeClr val="dk1"/>
-                </a:lnRef>
-                <a:fillRef idx="2">
-                  <a:schemeClr val="dk1"/>
-                </a:fillRef>
-                <a:effectRef idx="1">
-                  <a:schemeClr val="dk1"/>
-                </a:effectRef>
-                <a:fontRef idx="minor">
-                  <a:schemeClr val="dk1"/>
-                </a:fontRef>
-              </p:style>
-              <p:txBody>
-                <a:bodyPr rtlCol="0" anchor="ctr"/>
-                <a:lstStyle/>
-                <a:p>
-                  <a:pPr algn="ctr"/>
-                  <a:endParaRPr kumimoji="1" lang="ja-JP" altLang="en-US" sz="1600">
-                    <a:latin typeface="メイリオ" panose="020B0604030504040204" pitchFamily="50" charset="-128"/>
-                    <a:ea typeface="メイリオ" panose="020B0604030504040204" pitchFamily="50" charset="-128"/>
-                  </a:endParaRPr>
-                </a:p>
-              </p:txBody>
-            </p:sp>
-            <p:sp>
-              <p:nvSpPr>
-                <p:cNvPr id="45" name="矢印: 下 44">
-                  <a:extLst>
-                    <a:ext uri="{FF2B5EF4-FFF2-40B4-BE49-F238E27FC236}">
-                      <a16:creationId xmlns:a16="http://schemas.microsoft.com/office/drawing/2014/main" id="{F7C1907A-69F5-4EA8-F0D2-423D138003B5}"/>
-                    </a:ext>
-                  </a:extLst>
-                </p:cNvPr>
-                <p:cNvSpPr/>
-                <p:nvPr/>
-              </p:nvSpPr>
-              <p:spPr>
-                <a:xfrm>
-                  <a:off x="20044862" y="12011276"/>
-                  <a:ext cx="304144" cy="888859"/>
-                </a:xfrm>
-                <a:prstGeom prst="downArrow">
-                  <a:avLst/>
-                </a:prstGeom>
-              </p:spPr>
-              <p:style>
-                <a:lnRef idx="1">
-                  <a:schemeClr val="dk1"/>
-                </a:lnRef>
-                <a:fillRef idx="2">
-                  <a:schemeClr val="dk1"/>
-                </a:fillRef>
-                <a:effectRef idx="1">
-                  <a:schemeClr val="dk1"/>
-                </a:effectRef>
-                <a:fontRef idx="minor">
-                  <a:schemeClr val="dk1"/>
-                </a:fontRef>
-              </p:style>
-              <p:txBody>
-                <a:bodyPr rtlCol="0" anchor="ctr"/>
-                <a:lstStyle/>
-                <a:p>
-                  <a:pPr algn="ctr"/>
-                  <a:endParaRPr kumimoji="1" lang="ja-JP" altLang="en-US" sz="1600">
-                    <a:latin typeface="メイリオ" panose="020B0604030504040204" pitchFamily="50" charset="-128"/>
-                    <a:ea typeface="メイリオ" panose="020B0604030504040204" pitchFamily="50" charset="-128"/>
-                  </a:endParaRPr>
-                </a:p>
-              </p:txBody>
-            </p:sp>
-            <p:sp>
-              <p:nvSpPr>
-                <p:cNvPr id="46" name="矢印: 下 45">
-                  <a:extLst>
-                    <a:ext uri="{FF2B5EF4-FFF2-40B4-BE49-F238E27FC236}">
-                      <a16:creationId xmlns:a16="http://schemas.microsoft.com/office/drawing/2014/main" id="{098B0251-C361-EDF7-F26C-364C2776F1EB}"/>
-                    </a:ext>
-                  </a:extLst>
-                </p:cNvPr>
-                <p:cNvSpPr/>
-                <p:nvPr/>
-              </p:nvSpPr>
-              <p:spPr>
-                <a:xfrm rot="10800000">
-                  <a:off x="20052043" y="13902325"/>
-                  <a:ext cx="307912" cy="1487841"/>
-                </a:xfrm>
-                <a:prstGeom prst="downArrow">
-                  <a:avLst/>
-                </a:prstGeom>
-              </p:spPr>
-              <p:style>
-                <a:lnRef idx="1">
-                  <a:schemeClr val="dk1"/>
-                </a:lnRef>
-                <a:fillRef idx="2">
-                  <a:schemeClr val="dk1"/>
-                </a:fillRef>
-                <a:effectRef idx="1">
-                  <a:schemeClr val="dk1"/>
-                </a:effectRef>
-                <a:fontRef idx="minor">
-                  <a:schemeClr val="dk1"/>
-                </a:fontRef>
-              </p:style>
-              <p:txBody>
-                <a:bodyPr rtlCol="0" anchor="ctr"/>
-                <a:lstStyle/>
-                <a:p>
-                  <a:pPr algn="ctr"/>
-                  <a:endParaRPr kumimoji="1" lang="ja-JP" altLang="en-US" sz="1600">
-                    <a:latin typeface="メイリオ" panose="020B0604030504040204" pitchFamily="50" charset="-128"/>
-                    <a:ea typeface="メイリオ" panose="020B0604030504040204" pitchFamily="50" charset="-128"/>
-                  </a:endParaRPr>
-                </a:p>
-              </p:txBody>
-            </p:sp>
-          </p:grpSp>
-          <p:sp>
-            <p:nvSpPr>
-              <p:cNvPr id="26" name="正方形/長方形 25">
+              </a:tr>
+              <a:tr h="357307">
+                <a:tc>
+                  <a:txBody>
+                    <a:bodyPr/>
+                    <a:lstStyle/>
+                    <a:p>
+                      <a:pPr algn="ctr"/>
+                      <a:r>
+                        <a:rPr kumimoji="1" lang="en-US" altLang="ja-JP" sz="1600" dirty="0"/>
+                        <a:t>4</a:t>
+                      </a:r>
+                      <a:r>
+                        <a:rPr kumimoji="1" lang="ja-JP" altLang="en-US" sz="1600" dirty="0"/>
+                        <a:t>割以上</a:t>
+                      </a:r>
+                    </a:p>
+                  </a:txBody>
+                  <a:tcPr marL="84525" marR="84525" marT="42262" marB="42262"/>
+                </a:tc>
+                <a:tc>
+                  <a:txBody>
+                    <a:bodyPr/>
+                    <a:lstStyle/>
+                    <a:p>
+                      <a:pPr algn="ctr"/>
+                      <a:r>
+                        <a:rPr kumimoji="1" lang="en-US" altLang="ja-JP" sz="1600" i="0" u="sng" dirty="0"/>
+                        <a:t>4</a:t>
+                      </a:r>
+                      <a:endParaRPr kumimoji="1" lang="ja-JP" altLang="en-US" sz="1600" i="0" u="sng" dirty="0"/>
+                    </a:p>
+                  </a:txBody>
+                  <a:tcPr marL="84525" marR="84525" marT="42262" marB="42262"/>
+                </a:tc>
+                <a:tc>
+                  <a:txBody>
+                    <a:bodyPr/>
+                    <a:lstStyle/>
+                    <a:p>
+                      <a:pPr algn="ctr"/>
+                      <a:r>
+                        <a:rPr kumimoji="1" lang="en-US" altLang="ja-JP" sz="1600" b="0" u="sng" dirty="0">
+                          <a:solidFill>
+                            <a:schemeClr val="tx1"/>
+                          </a:solidFill>
+                        </a:rPr>
+                        <a:t>1</a:t>
+                      </a:r>
+                      <a:endParaRPr kumimoji="1" lang="ja-JP" altLang="en-US" sz="1600" b="0" u="sng" dirty="0">
+                        <a:solidFill>
+                          <a:schemeClr val="tx1"/>
+                        </a:solidFill>
+                      </a:endParaRPr>
+                    </a:p>
+                  </a:txBody>
+                  <a:tcPr marL="84525" marR="84525" marT="42262" marB="42262"/>
+                </a:tc>
                 <a:extLst>
-                  <a:ext uri="{FF2B5EF4-FFF2-40B4-BE49-F238E27FC236}">
-                    <a16:creationId xmlns:a16="http://schemas.microsoft.com/office/drawing/2014/main" id="{7FB5ACA8-95A0-1C03-A76C-64815D5986D0}"/>
+                  <a:ext uri="{0D108BD9-81ED-4DB2-BD59-A6C34878D82A}">
+                    <a16:rowId xmlns:a16="http://schemas.microsoft.com/office/drawing/2014/main" val="3010588515"/>
                   </a:ext>
                 </a:extLst>
-              </p:cNvPr>
-              <p:cNvSpPr/>
-              <p:nvPr/>
-            </p:nvSpPr>
-            <p:spPr>
-              <a:xfrm>
-                <a:off x="24606965" y="7051337"/>
-                <a:ext cx="5278714" cy="9889578"/>
-              </a:xfrm>
-              <a:prstGeom prst="rect">
-                <a:avLst/>
-              </a:prstGeom>
-              <a:noFill/>
-            </p:spPr>
-            <p:style>
-              <a:lnRef idx="2">
-                <a:schemeClr val="dk1"/>
-              </a:lnRef>
-              <a:fillRef idx="1">
-                <a:schemeClr val="lt1"/>
-              </a:fillRef>
-              <a:effectRef idx="0">
-                <a:schemeClr val="dk1"/>
-              </a:effectRef>
-              <a:fontRef idx="minor">
-                <a:schemeClr val="dk1"/>
-              </a:fontRef>
-            </p:style>
-            <p:txBody>
-              <a:bodyPr rtlCol="0" anchor="ctr"/>
-              <a:lstStyle/>
-              <a:p>
-                <a:pPr algn="ctr"/>
-                <a:endParaRPr kumimoji="1" lang="ja-JP" altLang="en-US" sz="1600">
-                  <a:latin typeface="メイリオ" panose="020B0604030504040204" pitchFamily="50" charset="-128"/>
-                  <a:ea typeface="メイリオ" panose="020B0604030504040204" pitchFamily="50" charset="-128"/>
-                </a:endParaRPr>
-              </a:p>
-            </p:txBody>
-          </p:sp>
-          <p:grpSp>
-            <p:nvGrpSpPr>
-              <p:cNvPr id="27" name="グループ化 26">
-                <a:extLst>
-                  <a:ext uri="{FF2B5EF4-FFF2-40B4-BE49-F238E27FC236}">
-                    <a16:creationId xmlns:a16="http://schemas.microsoft.com/office/drawing/2014/main" id="{E190E8C3-CFF7-56A1-C3BB-72575950948D}"/>
-                  </a:ext>
-                </a:extLst>
-              </p:cNvPr>
-              <p:cNvGrpSpPr/>
-              <p:nvPr/>
-            </p:nvGrpSpPr>
-            <p:grpSpPr>
-              <a:xfrm>
-                <a:off x="25874061" y="7255262"/>
-                <a:ext cx="3893366" cy="9138258"/>
-                <a:chOff x="25490600" y="7137274"/>
-                <a:chExt cx="3893366" cy="9138258"/>
-              </a:xfrm>
-            </p:grpSpPr>
-            <p:sp>
-              <p:nvSpPr>
-                <p:cNvPr id="28" name="正方形/長方形 27">
-                  <a:extLst>
-                    <a:ext uri="{FF2B5EF4-FFF2-40B4-BE49-F238E27FC236}">
-                      <a16:creationId xmlns:a16="http://schemas.microsoft.com/office/drawing/2014/main" id="{F3E374D0-28D2-797B-2151-812B4EE04FA7}"/>
-                    </a:ext>
-                  </a:extLst>
-                </p:cNvPr>
-                <p:cNvSpPr/>
-                <p:nvPr/>
-              </p:nvSpPr>
-              <p:spPr>
-                <a:xfrm>
-                  <a:off x="25538868" y="15331539"/>
-                  <a:ext cx="3845098" cy="943993"/>
-                </a:xfrm>
-                <a:prstGeom prst="rect">
-                  <a:avLst/>
-                </a:prstGeom>
-              </p:spPr>
-              <p:style>
-                <a:lnRef idx="1">
-                  <a:schemeClr val="accent5"/>
-                </a:lnRef>
-                <a:fillRef idx="2">
-                  <a:schemeClr val="accent5"/>
-                </a:fillRef>
-                <a:effectRef idx="1">
-                  <a:schemeClr val="accent5"/>
-                </a:effectRef>
-                <a:fontRef idx="minor">
-                  <a:schemeClr val="dk1"/>
-                </a:fontRef>
-              </p:style>
-              <p:txBody>
-                <a:bodyPr rtlCol="0" anchor="ctr"/>
-                <a:lstStyle/>
-                <a:p>
-                  <a:pPr algn="ctr"/>
-                  <a:r>
-                    <a:rPr kumimoji="1" lang="ja-JP" altLang="en-US" sz="1600" dirty="0">
-                      <a:latin typeface="メイリオ" panose="020B0604030504040204" pitchFamily="50" charset="-128"/>
-                      <a:ea typeface="メイリオ" panose="020B0604030504040204" pitchFamily="50" charset="-128"/>
-                    </a:rPr>
-                    <a:t>専門医の診断</a:t>
-                  </a:r>
-                </a:p>
-              </p:txBody>
-            </p:sp>
-            <p:sp>
-              <p:nvSpPr>
-                <p:cNvPr id="29" name="正方形/長方形 28">
-                  <a:extLst>
-                    <a:ext uri="{FF2B5EF4-FFF2-40B4-BE49-F238E27FC236}">
-                      <a16:creationId xmlns:a16="http://schemas.microsoft.com/office/drawing/2014/main" id="{69C57C20-1A92-F619-D372-3E6CBDF0B95F}"/>
-                    </a:ext>
-                  </a:extLst>
-                </p:cNvPr>
-                <p:cNvSpPr/>
-                <p:nvPr/>
-              </p:nvSpPr>
-              <p:spPr>
-                <a:xfrm>
-                  <a:off x="25490600" y="11105540"/>
-                  <a:ext cx="3775587" cy="983281"/>
-                </a:xfrm>
-                <a:prstGeom prst="rect">
-                  <a:avLst/>
-                </a:prstGeom>
-              </p:spPr>
-              <p:style>
-                <a:lnRef idx="1">
-                  <a:schemeClr val="accent5"/>
-                </a:lnRef>
-                <a:fillRef idx="2">
-                  <a:schemeClr val="accent5"/>
-                </a:fillRef>
-                <a:effectRef idx="1">
-                  <a:schemeClr val="accent5"/>
-                </a:effectRef>
-                <a:fontRef idx="minor">
-                  <a:schemeClr val="dk1"/>
-                </a:fontRef>
-              </p:style>
-              <p:txBody>
-                <a:bodyPr rtlCol="0" anchor="ctr"/>
-                <a:lstStyle/>
-                <a:p>
-                  <a:pPr algn="ctr"/>
-                  <a:r>
-                    <a:rPr kumimoji="1" lang="ja-JP" altLang="en-US" sz="1600" dirty="0">
-                      <a:latin typeface="メイリオ" panose="020B0604030504040204" pitchFamily="50" charset="-128"/>
-                      <a:ea typeface="メイリオ" panose="020B0604030504040204" pitchFamily="50" charset="-128"/>
-                    </a:rPr>
-                    <a:t>特徴量の抽出</a:t>
-                  </a:r>
-                </a:p>
-              </p:txBody>
-            </p:sp>
-            <p:sp>
-              <p:nvSpPr>
-                <p:cNvPr id="30" name="四角形: 角を丸くする 29">
-                  <a:extLst>
-                    <a:ext uri="{FF2B5EF4-FFF2-40B4-BE49-F238E27FC236}">
-                      <a16:creationId xmlns:a16="http://schemas.microsoft.com/office/drawing/2014/main" id="{9442CFC5-1F51-F0BA-B612-7D76C729A27F}"/>
-                    </a:ext>
-                  </a:extLst>
-                </p:cNvPr>
-                <p:cNvSpPr/>
-                <p:nvPr/>
-              </p:nvSpPr>
-              <p:spPr>
-                <a:xfrm>
-                  <a:off x="26131813" y="14205715"/>
-                  <a:ext cx="2810266" cy="830997"/>
-                </a:xfrm>
-                <a:prstGeom prst="roundRect">
-                  <a:avLst/>
-                </a:prstGeom>
-              </p:spPr>
-              <p:style>
-                <a:lnRef idx="3">
-                  <a:schemeClr val="lt1"/>
-                </a:lnRef>
-                <a:fillRef idx="1">
-                  <a:schemeClr val="accent2"/>
-                </a:fillRef>
-                <a:effectRef idx="1">
-                  <a:schemeClr val="accent2"/>
-                </a:effectRef>
-                <a:fontRef idx="minor">
-                  <a:schemeClr val="lt1"/>
-                </a:fontRef>
-              </p:style>
-              <p:txBody>
-                <a:bodyPr rtlCol="0" anchor="ctr"/>
-                <a:lstStyle/>
-                <a:p>
-                  <a:pPr algn="ctr"/>
-                  <a:r>
-                    <a:rPr kumimoji="1" lang="ja-JP" altLang="en-US" sz="1600" dirty="0">
-                      <a:latin typeface="メイリオ" panose="020B0604030504040204" pitchFamily="50" charset="-128"/>
-                      <a:ea typeface="メイリオ" panose="020B0604030504040204" pitchFamily="50" charset="-128"/>
-                    </a:rPr>
-                    <a:t>分類結果</a:t>
-                  </a:r>
-                </a:p>
-              </p:txBody>
-            </p:sp>
-            <p:sp>
-              <p:nvSpPr>
-                <p:cNvPr id="31" name="正方形/長方形 30">
-                  <a:extLst>
-                    <a:ext uri="{FF2B5EF4-FFF2-40B4-BE49-F238E27FC236}">
-                      <a16:creationId xmlns:a16="http://schemas.microsoft.com/office/drawing/2014/main" id="{C4B87AD9-F5B4-7DB8-5111-471D70759283}"/>
-                    </a:ext>
-                  </a:extLst>
-                </p:cNvPr>
-                <p:cNvSpPr/>
-                <p:nvPr/>
-              </p:nvSpPr>
-              <p:spPr>
-                <a:xfrm>
-                  <a:off x="25491277" y="7137274"/>
-                  <a:ext cx="3775588" cy="1238619"/>
-                </a:xfrm>
-                <a:prstGeom prst="rect">
-                  <a:avLst/>
-                </a:prstGeom>
-              </p:spPr>
-              <p:style>
-                <a:lnRef idx="1">
-                  <a:schemeClr val="accent5"/>
-                </a:lnRef>
-                <a:fillRef idx="2">
-                  <a:schemeClr val="accent5"/>
-                </a:fillRef>
-                <a:effectRef idx="1">
-                  <a:schemeClr val="accent5"/>
-                </a:effectRef>
-                <a:fontRef idx="minor">
-                  <a:schemeClr val="dk1"/>
-                </a:fontRef>
-              </p:style>
-              <p:txBody>
-                <a:bodyPr rtlCol="0" anchor="ctr"/>
-                <a:lstStyle/>
-                <a:p>
-                  <a:pPr algn="ctr"/>
-                  <a:r>
-                    <a:rPr kumimoji="1" lang="en-US" altLang="ja-JP" sz="1600" dirty="0">
-                      <a:latin typeface="メイリオ" panose="020B0604030504040204" pitchFamily="50" charset="-128"/>
-                      <a:ea typeface="メイリオ" panose="020B0604030504040204" pitchFamily="50" charset="-128"/>
-                    </a:rPr>
-                    <a:t>1</a:t>
-                  </a:r>
-                  <a:r>
-                    <a:rPr kumimoji="1" lang="ja-JP" altLang="en-US" sz="1600" dirty="0">
-                      <a:latin typeface="メイリオ" panose="020B0604030504040204" pitchFamily="50" charset="-128"/>
-                      <a:ea typeface="メイリオ" panose="020B0604030504040204" pitchFamily="50" charset="-128"/>
-                    </a:rPr>
-                    <a:t>人の患者の</a:t>
-                  </a:r>
-                  <a:br>
-                    <a:rPr kumimoji="1" lang="en-US" altLang="ja-JP" sz="1600" dirty="0">
-                      <a:latin typeface="メイリオ" panose="020B0604030504040204" pitchFamily="50" charset="-128"/>
-                      <a:ea typeface="メイリオ" panose="020B0604030504040204" pitchFamily="50" charset="-128"/>
-                    </a:rPr>
-                  </a:br>
-                  <a:r>
-                    <a:rPr kumimoji="1" lang="ja-JP" altLang="en-US" sz="1600" dirty="0">
-                      <a:latin typeface="メイリオ" panose="020B0604030504040204" pitchFamily="50" charset="-128"/>
-                      <a:ea typeface="メイリオ" panose="020B0604030504040204" pitchFamily="50" charset="-128"/>
-                    </a:rPr>
-                    <a:t>会話場面の録画</a:t>
-                  </a:r>
-                </a:p>
-              </p:txBody>
-            </p:sp>
-            <p:sp>
-              <p:nvSpPr>
-                <p:cNvPr id="32" name="矢印: 下 31">
-                  <a:extLst>
-                    <a:ext uri="{FF2B5EF4-FFF2-40B4-BE49-F238E27FC236}">
-                      <a16:creationId xmlns:a16="http://schemas.microsoft.com/office/drawing/2014/main" id="{3E027733-B1AC-3E56-881D-81C47495463E}"/>
-                    </a:ext>
-                  </a:extLst>
-                </p:cNvPr>
-                <p:cNvSpPr/>
-                <p:nvPr/>
-              </p:nvSpPr>
-              <p:spPr>
-                <a:xfrm>
-                  <a:off x="25789421" y="8260185"/>
-                  <a:ext cx="304144" cy="888859"/>
-                </a:xfrm>
-                <a:prstGeom prst="downArrow">
-                  <a:avLst/>
-                </a:prstGeom>
-              </p:spPr>
-              <p:style>
-                <a:lnRef idx="1">
-                  <a:schemeClr val="dk1"/>
-                </a:lnRef>
-                <a:fillRef idx="2">
-                  <a:schemeClr val="dk1"/>
-                </a:fillRef>
-                <a:effectRef idx="1">
-                  <a:schemeClr val="dk1"/>
-                </a:effectRef>
-                <a:fontRef idx="minor">
-                  <a:schemeClr val="dk1"/>
-                </a:fontRef>
-              </p:style>
-              <p:txBody>
-                <a:bodyPr rtlCol="0" anchor="ctr"/>
-                <a:lstStyle/>
-                <a:p>
-                  <a:pPr algn="ctr"/>
-                  <a:endParaRPr kumimoji="1" lang="ja-JP" altLang="en-US" sz="1600">
-                    <a:latin typeface="メイリオ" panose="020B0604030504040204" pitchFamily="50" charset="-128"/>
-                    <a:ea typeface="メイリオ" panose="020B0604030504040204" pitchFamily="50" charset="-128"/>
-                  </a:endParaRPr>
-                </a:p>
-              </p:txBody>
-            </p:sp>
-            <p:sp>
-              <p:nvSpPr>
-                <p:cNvPr id="33" name="正方形/長方形 32">
-                  <a:extLst>
-                    <a:ext uri="{FF2B5EF4-FFF2-40B4-BE49-F238E27FC236}">
-                      <a16:creationId xmlns:a16="http://schemas.microsoft.com/office/drawing/2014/main" id="{005AF47A-B572-2594-DDC4-21B2145A542F}"/>
-                    </a:ext>
-                  </a:extLst>
-                </p:cNvPr>
-                <p:cNvSpPr/>
-                <p:nvPr/>
-              </p:nvSpPr>
-              <p:spPr>
-                <a:xfrm>
-                  <a:off x="25490609" y="9184710"/>
-                  <a:ext cx="3775587" cy="983280"/>
-                </a:xfrm>
-                <a:prstGeom prst="rect">
-                  <a:avLst/>
-                </a:prstGeom>
-              </p:spPr>
-              <p:style>
-                <a:lnRef idx="1">
-                  <a:schemeClr val="accent5"/>
-                </a:lnRef>
-                <a:fillRef idx="2">
-                  <a:schemeClr val="accent5"/>
-                </a:fillRef>
-                <a:effectRef idx="1">
-                  <a:schemeClr val="accent5"/>
-                </a:effectRef>
-                <a:fontRef idx="minor">
-                  <a:schemeClr val="dk1"/>
-                </a:fontRef>
-              </p:style>
-              <p:txBody>
-                <a:bodyPr rtlCol="0" anchor="ctr"/>
-                <a:lstStyle/>
-                <a:p>
-                  <a:pPr algn="ctr"/>
-                  <a:r>
-                    <a:rPr kumimoji="1" lang="ja-JP" altLang="en-US" sz="1600" dirty="0">
-                      <a:latin typeface="メイリオ" panose="020B0604030504040204" pitchFamily="50" charset="-128"/>
-                      <a:ea typeface="メイリオ" panose="020B0604030504040204" pitchFamily="50" charset="-128"/>
-                    </a:rPr>
-                    <a:t>発話区間の抽出</a:t>
-                  </a:r>
-                </a:p>
-              </p:txBody>
-            </p:sp>
-            <p:sp>
-              <p:nvSpPr>
-                <p:cNvPr id="34" name="矢印: 下 33">
-                  <a:extLst>
-                    <a:ext uri="{FF2B5EF4-FFF2-40B4-BE49-F238E27FC236}">
-                      <a16:creationId xmlns:a16="http://schemas.microsoft.com/office/drawing/2014/main" id="{C6A64601-6691-5F33-4A06-5669DA5314E6}"/>
-                    </a:ext>
-                  </a:extLst>
-                </p:cNvPr>
-                <p:cNvSpPr/>
-                <p:nvPr/>
-              </p:nvSpPr>
-              <p:spPr>
-                <a:xfrm>
-                  <a:off x="25789421" y="10182125"/>
-                  <a:ext cx="304144" cy="888859"/>
-                </a:xfrm>
-                <a:prstGeom prst="downArrow">
-                  <a:avLst/>
-                </a:prstGeom>
-              </p:spPr>
-              <p:style>
-                <a:lnRef idx="1">
-                  <a:schemeClr val="dk1"/>
-                </a:lnRef>
-                <a:fillRef idx="2">
-                  <a:schemeClr val="dk1"/>
-                </a:fillRef>
-                <a:effectRef idx="1">
-                  <a:schemeClr val="dk1"/>
-                </a:effectRef>
-                <a:fontRef idx="minor">
-                  <a:schemeClr val="dk1"/>
-                </a:fontRef>
-              </p:style>
-              <p:txBody>
-                <a:bodyPr rtlCol="0" anchor="ctr"/>
-                <a:lstStyle/>
-                <a:p>
-                  <a:pPr algn="ctr"/>
-                  <a:endParaRPr kumimoji="1" lang="ja-JP" altLang="en-US" sz="1600">
-                    <a:latin typeface="メイリオ" panose="020B0604030504040204" pitchFamily="50" charset="-128"/>
-                    <a:ea typeface="メイリオ" panose="020B0604030504040204" pitchFamily="50" charset="-128"/>
-                  </a:endParaRPr>
-                </a:p>
-              </p:txBody>
-            </p:sp>
-            <p:sp>
-              <p:nvSpPr>
-                <p:cNvPr id="35" name="矢印: 下 34">
-                  <a:extLst>
-                    <a:ext uri="{FF2B5EF4-FFF2-40B4-BE49-F238E27FC236}">
-                      <a16:creationId xmlns:a16="http://schemas.microsoft.com/office/drawing/2014/main" id="{873092C8-A15B-8C5B-C968-D48452D97867}"/>
-                    </a:ext>
-                  </a:extLst>
-                </p:cNvPr>
-                <p:cNvSpPr/>
-                <p:nvPr/>
-              </p:nvSpPr>
-              <p:spPr>
-                <a:xfrm>
-                  <a:off x="25798775" y="12044564"/>
-                  <a:ext cx="394357" cy="3297854"/>
-                </a:xfrm>
-                <a:prstGeom prst="downArrow">
-                  <a:avLst/>
-                </a:prstGeom>
-              </p:spPr>
-              <p:style>
-                <a:lnRef idx="1">
-                  <a:schemeClr val="dk1"/>
-                </a:lnRef>
-                <a:fillRef idx="2">
-                  <a:schemeClr val="dk1"/>
-                </a:fillRef>
-                <a:effectRef idx="1">
-                  <a:schemeClr val="dk1"/>
-                </a:effectRef>
-                <a:fontRef idx="minor">
-                  <a:schemeClr val="dk1"/>
-                </a:fontRef>
-              </p:style>
-              <p:txBody>
-                <a:bodyPr rtlCol="0" anchor="ctr"/>
-                <a:lstStyle/>
-                <a:p>
-                  <a:pPr algn="ctr"/>
-                  <a:endParaRPr kumimoji="1" lang="ja-JP" altLang="en-US" sz="1600">
-                    <a:latin typeface="メイリオ" panose="020B0604030504040204" pitchFamily="50" charset="-128"/>
-                    <a:ea typeface="メイリオ" panose="020B0604030504040204" pitchFamily="50" charset="-128"/>
-                  </a:endParaRPr>
-                </a:p>
-              </p:txBody>
-            </p:sp>
-          </p:grpSp>
-        </p:grpSp>
-        <p:sp>
-          <p:nvSpPr>
-            <p:cNvPr id="47" name="四角形: 角を丸くする 46">
-              <a:extLst>
-                <a:ext uri="{FF2B5EF4-FFF2-40B4-BE49-F238E27FC236}">
-                  <a16:creationId xmlns:a16="http://schemas.microsoft.com/office/drawing/2014/main" id="{EED54B67-6C7B-2E38-D2AA-CC269A711A52}"/>
-                </a:ext>
-              </a:extLst>
-            </p:cNvPr>
-            <p:cNvSpPr/>
-            <p:nvPr/>
-          </p:nvSpPr>
-          <p:spPr>
-            <a:xfrm>
-              <a:off x="11437166" y="8795820"/>
-              <a:ext cx="2810266" cy="830997"/>
-            </a:xfrm>
-            <a:prstGeom prst="roundRect">
-              <a:avLst/>
-            </a:prstGeom>
-            <a:solidFill>
-              <a:srgbClr val="FFC000"/>
-            </a:solidFill>
-            <a:ln>
-              <a:solidFill>
-                <a:schemeClr val="tx1"/>
-              </a:solidFill>
-            </a:ln>
-          </p:spPr>
-          <p:style>
-            <a:lnRef idx="3">
-              <a:schemeClr val="lt1"/>
-            </a:lnRef>
-            <a:fillRef idx="1">
-              <a:schemeClr val="accent2"/>
-            </a:fillRef>
-            <a:effectRef idx="1">
-              <a:schemeClr val="accent2"/>
-            </a:effectRef>
-            <a:fontRef idx="minor">
-              <a:schemeClr val="lt1"/>
-            </a:fontRef>
-          </p:style>
-          <p:txBody>
-            <a:bodyPr rtlCol="0" anchor="ctr"/>
-            <a:lstStyle/>
-            <a:p>
-              <a:pPr algn="ctr"/>
-              <a:r>
-                <a:rPr kumimoji="1" lang="ja-JP" altLang="en-US" sz="1600" dirty="0">
-                  <a:solidFill>
-                    <a:schemeClr val="tx1"/>
-                  </a:solidFill>
-                  <a:latin typeface="メイリオ" panose="020B0604030504040204" pitchFamily="50" charset="-128"/>
-                  <a:ea typeface="メイリオ" panose="020B0604030504040204" pitchFamily="50" charset="-128"/>
-                </a:rPr>
-                <a:t>分類モデル</a:t>
-              </a:r>
-            </a:p>
-          </p:txBody>
-        </p:sp>
-      </p:grpSp>
+              </a:tr>
+            </a:tbl>
+          </a:graphicData>
+        </a:graphic>
+      </p:graphicFrame>
+      <p:sp>
+        <p:nvSpPr>
+          <p:cNvPr id="10" name="テキスト ボックス 9">
+            <a:extLst>
+              <a:ext uri="{FF2B5EF4-FFF2-40B4-BE49-F238E27FC236}">
+                <a16:creationId xmlns:a16="http://schemas.microsoft.com/office/drawing/2014/main" id="{528EE0EE-2FAE-CC92-CAE6-B3AB8EA3DF49}"/>
+              </a:ext>
+            </a:extLst>
+          </p:cNvPr>
+          <p:cNvSpPr txBox="1"/>
+          <p:nvPr/>
+        </p:nvSpPr>
+        <p:spPr>
+          <a:xfrm>
+            <a:off x="4745950" y="3570415"/>
+            <a:ext cx="3356263" cy="369332"/>
+          </a:xfrm>
+          <a:prstGeom prst="rect">
+            <a:avLst/>
+          </a:prstGeom>
+          <a:noFill/>
+        </p:spPr>
+        <p:txBody>
+          <a:bodyPr wrap="square" rtlCol="0">
+            <a:spAutoFit/>
+          </a:bodyPr>
+          <a:lstStyle/>
+          <a:p>
+            <a:pPr algn="ctr"/>
+            <a:r>
+              <a:rPr kumimoji="1" lang="ja-JP" altLang="en-US" dirty="0"/>
+              <a:t>表</a:t>
+            </a:r>
+            <a:r>
+              <a:rPr kumimoji="1" lang="en-US" altLang="ja-JP" dirty="0"/>
+              <a:t>4</a:t>
+            </a:r>
+            <a:r>
+              <a:rPr kumimoji="1" lang="ja-JP" altLang="en-US" dirty="0"/>
+              <a:t>：割合ごとの患者数</a:t>
+            </a:r>
+          </a:p>
+        </p:txBody>
+      </p:sp>
     </p:spTree>
     <p:extLst>
       <p:ext uri="{BB962C8B-B14F-4D97-AF65-F5344CB8AC3E}">
-        <p14:creationId xmlns:p14="http://schemas.microsoft.com/office/powerpoint/2010/main" val="4217677172"/>
+        <p14:creationId xmlns:p14="http://schemas.microsoft.com/office/powerpoint/2010/main" val="228953523"/>
       </p:ext>
     </p:extLst>
   </p:cSld>
@@ -10755,13 +10000,7 @@
   <p:cSld>
     <p:spTree>
       <p:nvGrpSpPr>
-        <p:cNvPr id="1" name="">
-          <a:extLst>
-            <a:ext uri="{FF2B5EF4-FFF2-40B4-BE49-F238E27FC236}">
-              <a16:creationId xmlns:a16="http://schemas.microsoft.com/office/drawing/2014/main" id="{785CE6D2-7DB4-3D7E-E81F-2AEAF8586D28}"/>
-            </a:ext>
-          </a:extLst>
-        </p:cNvPr>
+        <p:cNvPr id="1" name=""/>
         <p:cNvGrpSpPr/>
         <p:nvPr/>
       </p:nvGrpSpPr>
@@ -10778,7 +10017,7 @@
           <p:cNvPr id="2" name="タイトル 1">
             <a:extLst>
               <a:ext uri="{FF2B5EF4-FFF2-40B4-BE49-F238E27FC236}">
-                <a16:creationId xmlns:a16="http://schemas.microsoft.com/office/drawing/2014/main" id="{C7F9BEDE-932D-8E0C-E8B8-FA94AEEE13C0}"/>
+                <a16:creationId xmlns:a16="http://schemas.microsoft.com/office/drawing/2014/main" id="{F6D9ADFA-0107-A9E8-9500-4337D3F2DC93}"/>
               </a:ext>
             </a:extLst>
           </p:cNvPr>
@@ -10796,17 +10035,22 @@
           <a:p>
             <a:r>
               <a:rPr kumimoji="1" lang="ja-JP" altLang="en-US" dirty="0"/>
-              <a:t>一連のプロセス</a:t>
-            </a:r>
+              <a:t>新データセットを使用し</a:t>
+            </a:r>
+            <a:r>
+              <a:rPr lang="ja-JP" altLang="en-US" dirty="0"/>
+              <a:t>たモデルの学習方法</a:t>
+            </a:r>
+            <a:endParaRPr kumimoji="1" lang="ja-JP" altLang="en-US" dirty="0"/>
           </a:p>
         </p:txBody>
       </p:sp>
       <p:sp>
         <p:nvSpPr>
-          <p:cNvPr id="3" name="テキスト プレースホルダー 2">
+          <p:cNvPr id="4" name="コンテンツ プレースホルダー 3">
             <a:extLst>
               <a:ext uri="{FF2B5EF4-FFF2-40B4-BE49-F238E27FC236}">
-                <a16:creationId xmlns:a16="http://schemas.microsoft.com/office/drawing/2014/main" id="{80C02AD6-5CDA-F6AD-E23C-6FD84D934459}"/>
+                <a16:creationId xmlns:a16="http://schemas.microsoft.com/office/drawing/2014/main" id="{5CCFFC96-B3B0-48B1-FD8C-32FB30E22D9D}"/>
               </a:ext>
             </a:extLst>
           </p:cNvPr>
@@ -10814,13 +10058,326 @@
             <a:spLocks noGrp="1"/>
           </p:cNvSpPr>
           <p:nvPr>
-            <p:ph type="body" sz="quarter" idx="10"/>
+            <p:ph sz="quarter" idx="13"/>
+          </p:nvPr>
+        </p:nvSpPr>
+        <p:spPr/>
+        <p:txBody>
+          <a:bodyPr/>
+          <a:lstStyle/>
+          <a:p>
+            <a:pPr marL="342900" indent="-342900">
+              <a:buFont typeface="Wingdings" panose="05000000000000000000" pitchFamily="2" charset="2"/>
+              <a:buChar char="Ø"/>
+            </a:pPr>
+            <a:r>
+              <a:rPr kumimoji="1" lang="ja-JP" altLang="en-US" dirty="0"/>
+              <a:t>新データセットを使用したモデルを作成</a:t>
+            </a:r>
+            <a:endParaRPr kumimoji="1" lang="en-US" altLang="ja-JP" dirty="0"/>
+          </a:p>
+          <a:p>
+            <a:pPr marL="877888" lvl="2" indent="-342900">
+              <a:lnSpc>
+                <a:spcPct val="150000"/>
+              </a:lnSpc>
+              <a:buFont typeface="Arial" panose="020B0604020202020204" pitchFamily="34" charset="0"/>
+              <a:buChar char="•"/>
+            </a:pPr>
+            <a:r>
+              <a:rPr kumimoji="1" lang="ja-JP" altLang="en-US" sz="2000" dirty="0"/>
+              <a:t>機械学習手法：ランダムフォレスト</a:t>
+            </a:r>
+            <a:endParaRPr kumimoji="1" lang="en-US" altLang="ja-JP" sz="2000" dirty="0"/>
+          </a:p>
+          <a:p>
+            <a:pPr marL="877888" lvl="2" indent="-342900">
+              <a:lnSpc>
+                <a:spcPct val="150000"/>
+              </a:lnSpc>
+              <a:buFont typeface="Arial" panose="020B0604020202020204" pitchFamily="34" charset="0"/>
+              <a:buChar char="•"/>
+            </a:pPr>
+            <a:r>
+              <a:rPr lang="ja-JP" altLang="en-US" sz="2000" dirty="0"/>
+              <a:t>特徴量設計：特徴量ごとに最大値、平均値、標準偏差、中央値を算出</a:t>
+            </a:r>
+            <a:endParaRPr lang="en-US" altLang="ja-JP" sz="2000" dirty="0"/>
+          </a:p>
+          <a:p>
+            <a:pPr marL="877888" lvl="2" indent="-342900">
+              <a:lnSpc>
+                <a:spcPct val="150000"/>
+              </a:lnSpc>
+              <a:buFont typeface="Arial" panose="020B0604020202020204" pitchFamily="34" charset="0"/>
+              <a:buChar char="•"/>
+            </a:pPr>
+            <a:r>
+              <a:rPr lang="ja-JP" altLang="en-US" sz="2000" dirty="0"/>
+              <a:t>使用区間：質問、応答、質問応答の両方</a:t>
+            </a:r>
+            <a:endParaRPr lang="en-US" altLang="ja-JP" sz="2000" dirty="0"/>
+          </a:p>
+          <a:p>
+            <a:pPr marL="877888" lvl="2" indent="-342900">
+              <a:lnSpc>
+                <a:spcPct val="150000"/>
+              </a:lnSpc>
+              <a:buFont typeface="Arial" panose="020B0604020202020204" pitchFamily="34" charset="0"/>
+              <a:buChar char="•"/>
+            </a:pPr>
+            <a:r>
+              <a:rPr lang="ja-JP" altLang="en-US" sz="2000" dirty="0"/>
+              <a:t>次元数：約</a:t>
+            </a:r>
+            <a:r>
+              <a:rPr lang="en-US" altLang="ja-JP" sz="2000" dirty="0"/>
+              <a:t>10</a:t>
+            </a:r>
+            <a:r>
+              <a:rPr lang="ja-JP" altLang="en-US" sz="2000" dirty="0"/>
+              <a:t>質問</a:t>
+            </a:r>
+            <a:r>
+              <a:rPr lang="en-US" altLang="ja-JP" sz="2000" dirty="0"/>
+              <a:t>×17</a:t>
+            </a:r>
+            <a:r>
+              <a:rPr lang="ja-JP" altLang="en-US" sz="2000" dirty="0"/>
+              <a:t>特徴量</a:t>
+            </a:r>
+            <a:r>
+              <a:rPr lang="en-US" altLang="ja-JP" sz="2000" dirty="0"/>
+              <a:t>(AU)</a:t>
+            </a:r>
+            <a:r>
+              <a:rPr lang="ja-JP" altLang="en-US" sz="2000" dirty="0"/>
+              <a:t>＝</a:t>
+            </a:r>
+            <a:r>
+              <a:rPr lang="en-US" altLang="ja-JP" sz="2000" dirty="0"/>
+              <a:t>170</a:t>
+            </a:r>
+            <a:r>
+              <a:rPr lang="ja-JP" altLang="en-US" sz="2000" dirty="0"/>
+              <a:t>次元</a:t>
+            </a:r>
+            <a:r>
+              <a:rPr lang="en-US" altLang="ja-JP" sz="2000" dirty="0"/>
+              <a:t>/</a:t>
+            </a:r>
+            <a:r>
+              <a:rPr lang="ja-JP" altLang="en-US" sz="2000" dirty="0"/>
+              <a:t>患者</a:t>
+            </a:r>
+            <a:r>
+              <a:rPr lang="en-US" altLang="ja-JP" sz="2000" dirty="0"/>
+              <a:t>1</a:t>
+            </a:r>
+            <a:r>
+              <a:rPr lang="ja-JP" altLang="en-US" sz="2000" dirty="0"/>
+              <a:t>人につき</a:t>
+            </a:r>
+            <a:endParaRPr lang="en-US" altLang="ja-JP" sz="2000" dirty="0"/>
+          </a:p>
+          <a:p>
+            <a:pPr marL="877888" lvl="2" indent="-342900">
+              <a:lnSpc>
+                <a:spcPct val="150000"/>
+              </a:lnSpc>
+              <a:buFont typeface="Arial" panose="020B0604020202020204" pitchFamily="34" charset="0"/>
+              <a:buChar char="•"/>
+            </a:pPr>
+            <a:r>
+              <a:rPr lang="ja-JP" altLang="en-US" sz="2000" dirty="0"/>
+              <a:t>評価指標：感度、特異度</a:t>
+            </a:r>
+            <a:endParaRPr kumimoji="1" lang="en-US" altLang="ja-JP" sz="2000" dirty="0"/>
+          </a:p>
+          <a:p>
+            <a:pPr marL="877888" lvl="2" indent="-342900">
+              <a:lnSpc>
+                <a:spcPct val="150000"/>
+              </a:lnSpc>
+              <a:buFont typeface="Arial" panose="020B0604020202020204" pitchFamily="34" charset="0"/>
+              <a:buChar char="•"/>
+            </a:pPr>
+            <a:r>
+              <a:rPr lang="ja-JP" altLang="en-US" sz="2000" dirty="0"/>
+              <a:t>データ分割手法：</a:t>
+            </a:r>
+            <a:r>
+              <a:rPr lang="en-US" altLang="ja-JP" sz="2000" dirty="0"/>
+              <a:t>5</a:t>
+            </a:r>
+            <a:r>
+              <a:rPr lang="ja-JP" altLang="en-US" sz="2000" dirty="0"/>
+              <a:t>分割層化交差検証</a:t>
+            </a:r>
+            <a:br>
+              <a:rPr lang="en-US" altLang="ja-JP" sz="2000" dirty="0"/>
+            </a:br>
+            <a:r>
+              <a:rPr lang="en-US" altLang="ja-JP" sz="1800" dirty="0"/>
+              <a:t>1</a:t>
+            </a:r>
+            <a:r>
+              <a:rPr lang="ja-JP" altLang="en-US" sz="1800" dirty="0"/>
+              <a:t>．各グループでせん妄、非せん妄患者の割合が均等になるように、データを</a:t>
+            </a:r>
+            <a:r>
+              <a:rPr lang="en-US" altLang="ja-JP" sz="1800" dirty="0"/>
+              <a:t>5</a:t>
+            </a:r>
+            <a:r>
+              <a:rPr lang="ja-JP" altLang="en-US" sz="1800" dirty="0"/>
+              <a:t>分割</a:t>
+            </a:r>
+            <a:br>
+              <a:rPr lang="en-US" altLang="ja-JP" sz="1800" dirty="0"/>
+            </a:br>
+            <a:r>
+              <a:rPr lang="en-US" altLang="ja-JP" sz="1800" dirty="0"/>
+              <a:t>2</a:t>
+            </a:r>
+            <a:r>
+              <a:rPr lang="ja-JP" altLang="en-US" sz="1800" dirty="0"/>
+              <a:t>．学習データをのみを使用して特徴量選択</a:t>
+            </a:r>
+            <a:br>
+              <a:rPr lang="en-US" altLang="ja-JP" sz="1800" dirty="0"/>
+            </a:br>
+            <a:r>
+              <a:rPr lang="en-US" altLang="ja-JP" sz="1800" dirty="0"/>
+              <a:t>3</a:t>
+            </a:r>
+            <a:r>
+              <a:rPr lang="ja-JP" altLang="en-US" sz="1800" dirty="0"/>
+              <a:t>．さらに学習データグを使用してグリッドサーチでハイパーパラメータを決定</a:t>
+            </a:r>
+            <a:br>
+              <a:rPr lang="en-US" altLang="ja-JP" sz="1800" dirty="0"/>
+            </a:br>
+            <a:r>
+              <a:rPr lang="en-US" altLang="ja-JP" sz="1800" dirty="0"/>
+              <a:t>4</a:t>
+            </a:r>
+            <a:r>
+              <a:rPr lang="ja-JP" altLang="en-US" sz="1800" dirty="0"/>
+              <a:t>．テストデータでの性能評価</a:t>
+            </a:r>
+            <a:br>
+              <a:rPr lang="en-US" altLang="ja-JP" sz="1800" dirty="0"/>
+            </a:br>
+            <a:r>
+              <a:rPr lang="en-US" altLang="ja-JP" sz="1800" dirty="0"/>
+              <a:t>5.2</a:t>
+            </a:r>
+            <a:r>
+              <a:rPr lang="ja-JP" altLang="en-US" sz="1800" dirty="0"/>
+              <a:t>～</a:t>
+            </a:r>
+            <a:r>
+              <a:rPr lang="en-US" altLang="ja-JP" sz="1800" dirty="0"/>
+              <a:t>4</a:t>
+            </a:r>
+            <a:r>
+              <a:rPr lang="ja-JP" altLang="en-US" sz="1800" dirty="0"/>
+              <a:t>を繰り返し、</a:t>
+            </a:r>
+            <a:r>
+              <a:rPr lang="en-US" altLang="ja-JP" sz="1800" dirty="0"/>
+              <a:t>5</a:t>
+            </a:r>
+            <a:r>
+              <a:rPr lang="ja-JP" altLang="en-US" sz="1800" dirty="0"/>
+              <a:t>回分の性能を統合して評価</a:t>
+            </a:r>
+            <a:br>
+              <a:rPr kumimoji="1" lang="en-US" altLang="ja-JP" dirty="0"/>
+            </a:br>
+            <a:endParaRPr kumimoji="1" lang="ja-JP" altLang="en-US" dirty="0"/>
+          </a:p>
+        </p:txBody>
+      </p:sp>
+    </p:spTree>
+    <p:extLst>
+      <p:ext uri="{BB962C8B-B14F-4D97-AF65-F5344CB8AC3E}">
+        <p14:creationId xmlns:p14="http://schemas.microsoft.com/office/powerpoint/2010/main" val="4267261990"/>
+      </p:ext>
+    </p:extLst>
+  </p:cSld>
+  <p:clrMapOvr>
+    <a:masterClrMapping/>
+  </p:clrMapOvr>
+</p:sld>
+</file>
+
+<file path=ppt/slides/slide14.xml><?xml version="1.0" encoding="utf-8"?>
+<p:sld xmlns:a="http://schemas.openxmlformats.org/drawingml/2006/main" xmlns:r="http://schemas.openxmlformats.org/officeDocument/2006/relationships" xmlns:p="http://schemas.openxmlformats.org/presentationml/2006/main">
+  <p:cSld>
+    <p:spTree>
+      <p:nvGrpSpPr>
+        <p:cNvPr id="1" name=""/>
+        <p:cNvGrpSpPr/>
+        <p:nvPr/>
+      </p:nvGrpSpPr>
+      <p:grpSpPr>
+        <a:xfrm>
+          <a:off x="0" y="0"/>
+          <a:ext cx="0" cy="0"/>
+          <a:chOff x="0" y="0"/>
+          <a:chExt cx="0" cy="0"/>
+        </a:xfrm>
+      </p:grpSpPr>
+      <p:sp>
+        <p:nvSpPr>
+          <p:cNvPr id="2" name="タイトル 1">
+            <a:extLst>
+              <a:ext uri="{FF2B5EF4-FFF2-40B4-BE49-F238E27FC236}">
+                <a16:creationId xmlns:a16="http://schemas.microsoft.com/office/drawing/2014/main" id="{C6C26F09-DAAF-E6D4-BA49-75F1B3C2B61A}"/>
+              </a:ext>
+            </a:extLst>
+          </p:cNvPr>
+          <p:cNvSpPr>
+            <a:spLocks noGrp="1"/>
+          </p:cNvSpPr>
+          <p:nvPr>
+            <p:ph type="title"/>
+          </p:nvPr>
+        </p:nvSpPr>
+        <p:spPr/>
+        <p:txBody>
+          <a:bodyPr/>
+          <a:lstStyle/>
+          <a:p>
+            <a:r>
+              <a:rPr kumimoji="1" lang="ja-JP" altLang="en-US" dirty="0"/>
+              <a:t>結果</a:t>
+            </a:r>
+          </a:p>
+        </p:txBody>
+      </p:sp>
+      <p:sp>
+        <p:nvSpPr>
+          <p:cNvPr id="4" name="コンテンツ プレースホルダー 3">
+            <a:extLst>
+              <a:ext uri="{FF2B5EF4-FFF2-40B4-BE49-F238E27FC236}">
+                <a16:creationId xmlns:a16="http://schemas.microsoft.com/office/drawing/2014/main" id="{227D79BC-E05D-C93C-F15C-AEEBC0544496}"/>
+              </a:ext>
+            </a:extLst>
+          </p:cNvPr>
+          <p:cNvSpPr>
+            <a:spLocks noGrp="1"/>
+          </p:cNvSpPr>
+          <p:nvPr>
+            <p:ph sz="quarter" idx="13"/>
           </p:nvPr>
         </p:nvSpPr>
         <p:spPr>
           <a:xfrm>
-            <a:off x="1097493" y="1039092"/>
-            <a:ext cx="10654238" cy="502382"/>
+            <a:off x="1096963" y="1160463"/>
+            <a:ext cx="10654238" cy="502383"/>
           </a:xfrm>
         </p:spPr>
         <p:txBody>
@@ -10832,103 +10389,1060 @@
               <a:buChar char="Ø"/>
             </a:pPr>
             <a:r>
-              <a:rPr lang="ja-JP" altLang="en-US" dirty="0"/>
-              <a:t>処理概要</a:t>
-            </a:r>
-            <a:endParaRPr lang="en-US" altLang="ja-JP" dirty="0"/>
-          </a:p>
-          <a:p>
-            <a:pPr lvl="1"/>
-            <a:endParaRPr lang="en-US" altLang="ja-JP" sz="2000" dirty="0"/>
-          </a:p>
-          <a:p>
-            <a:pPr marL="520700" lvl="1" indent="-342900">
+              <a:rPr kumimoji="1" lang="ja-JP" altLang="en-US" dirty="0"/>
+              <a:t>分類結果（縦軸：使用区間、横軸：特徴量設計）</a:t>
+            </a:r>
+          </a:p>
+        </p:txBody>
+      </p:sp>
+      <p:graphicFrame>
+        <p:nvGraphicFramePr>
+          <p:cNvPr id="5" name="コンテンツ プレースホルダー 16">
+            <a:extLst>
+              <a:ext uri="{FF2B5EF4-FFF2-40B4-BE49-F238E27FC236}">
+                <a16:creationId xmlns:a16="http://schemas.microsoft.com/office/drawing/2014/main" id="{AB594B58-C150-8AB4-322C-F67B5EA2480B}"/>
+              </a:ext>
+            </a:extLst>
+          </p:cNvPr>
+          <p:cNvGraphicFramePr>
+            <a:graphicFrameLocks/>
+          </p:cNvGraphicFramePr>
+          <p:nvPr>
+            <p:extLst>
+              <p:ext uri="{D42A27DB-BD31-4B8C-83A1-F6EECF244321}">
+                <p14:modId xmlns:p14="http://schemas.microsoft.com/office/powerpoint/2010/main" val="1799034732"/>
+              </p:ext>
+            </p:extLst>
+          </p:nvPr>
+        </p:nvGraphicFramePr>
+        <p:xfrm>
+          <a:off x="1014891" y="1864234"/>
+          <a:ext cx="10653714" cy="1854200"/>
+        </p:xfrm>
+        <a:graphic>
+          <a:graphicData uri="http://schemas.openxmlformats.org/drawingml/2006/table">
+            <a:tbl>
+              <a:tblPr firstRow="1" bandRow="1">
+                <a:tableStyleId>{21E4AEA4-8DFA-4A89-87EB-49C32662AFE0}</a:tableStyleId>
+              </a:tblPr>
+              <a:tblGrid>
+                <a:gridCol w="1183746">
+                  <a:extLst>
+                    <a:ext uri="{9D8B030D-6E8A-4147-A177-3AD203B41FA5}">
+                      <a16:colId xmlns:a16="http://schemas.microsoft.com/office/drawing/2014/main" val="3686559800"/>
+                    </a:ext>
+                  </a:extLst>
+                </a:gridCol>
+                <a:gridCol w="1183746">
+                  <a:extLst>
+                    <a:ext uri="{9D8B030D-6E8A-4147-A177-3AD203B41FA5}">
+                      <a16:colId xmlns:a16="http://schemas.microsoft.com/office/drawing/2014/main" val="1091076645"/>
+                    </a:ext>
+                  </a:extLst>
+                </a:gridCol>
+                <a:gridCol w="1183746">
+                  <a:extLst>
+                    <a:ext uri="{9D8B030D-6E8A-4147-A177-3AD203B41FA5}">
+                      <a16:colId xmlns:a16="http://schemas.microsoft.com/office/drawing/2014/main" val="1637090161"/>
+                    </a:ext>
+                  </a:extLst>
+                </a:gridCol>
+                <a:gridCol w="1183746">
+                  <a:extLst>
+                    <a:ext uri="{9D8B030D-6E8A-4147-A177-3AD203B41FA5}">
+                      <a16:colId xmlns:a16="http://schemas.microsoft.com/office/drawing/2014/main" val="2243731710"/>
+                    </a:ext>
+                  </a:extLst>
+                </a:gridCol>
+                <a:gridCol w="1183746">
+                  <a:extLst>
+                    <a:ext uri="{9D8B030D-6E8A-4147-A177-3AD203B41FA5}">
+                      <a16:colId xmlns:a16="http://schemas.microsoft.com/office/drawing/2014/main" val="1962526911"/>
+                    </a:ext>
+                  </a:extLst>
+                </a:gridCol>
+                <a:gridCol w="1183746">
+                  <a:extLst>
+                    <a:ext uri="{9D8B030D-6E8A-4147-A177-3AD203B41FA5}">
+                      <a16:colId xmlns:a16="http://schemas.microsoft.com/office/drawing/2014/main" val="1513122704"/>
+                    </a:ext>
+                  </a:extLst>
+                </a:gridCol>
+                <a:gridCol w="1183746">
+                  <a:extLst>
+                    <a:ext uri="{9D8B030D-6E8A-4147-A177-3AD203B41FA5}">
+                      <a16:colId xmlns:a16="http://schemas.microsoft.com/office/drawing/2014/main" val="4078009371"/>
+                    </a:ext>
+                  </a:extLst>
+                </a:gridCol>
+                <a:gridCol w="1183746">
+                  <a:extLst>
+                    <a:ext uri="{9D8B030D-6E8A-4147-A177-3AD203B41FA5}">
+                      <a16:colId xmlns:a16="http://schemas.microsoft.com/office/drawing/2014/main" val="3683200300"/>
+                    </a:ext>
+                  </a:extLst>
+                </a:gridCol>
+                <a:gridCol w="1183746">
+                  <a:extLst>
+                    <a:ext uri="{9D8B030D-6E8A-4147-A177-3AD203B41FA5}">
+                      <a16:colId xmlns:a16="http://schemas.microsoft.com/office/drawing/2014/main" val="3519691143"/>
+                    </a:ext>
+                  </a:extLst>
+                </a:gridCol>
+              </a:tblGrid>
+              <a:tr h="370840">
+                <a:tc rowSpan="2">
+                  <a:txBody>
+                    <a:bodyPr/>
+                    <a:lstStyle/>
+                    <a:p>
+                      <a:endParaRPr kumimoji="1" lang="ja-JP" altLang="en-US" dirty="0"/>
+                    </a:p>
+                  </a:txBody>
+                  <a:tcPr/>
+                </a:tc>
+                <a:tc gridSpan="2">
+                  <a:txBody>
+                    <a:bodyPr/>
+                    <a:lstStyle/>
+                    <a:p>
+                      <a:pPr algn="ctr"/>
+                      <a:r>
+                        <a:rPr kumimoji="1" lang="ja-JP" altLang="en-US" dirty="0"/>
+                        <a:t>平均値</a:t>
+                      </a:r>
+                    </a:p>
+                  </a:txBody>
+                  <a:tcPr/>
+                </a:tc>
+                <a:tc hMerge="1">
+                  <a:txBody>
+                    <a:bodyPr/>
+                    <a:lstStyle/>
+                    <a:p>
+                      <a:endParaRPr kumimoji="1" lang="ja-JP" altLang="en-US" dirty="0"/>
+                    </a:p>
+                  </a:txBody>
+                  <a:tcPr/>
+                </a:tc>
+                <a:tc gridSpan="2">
+                  <a:txBody>
+                    <a:bodyPr/>
+                    <a:lstStyle/>
+                    <a:p>
+                      <a:pPr algn="ctr"/>
+                      <a:r>
+                        <a:rPr kumimoji="1" lang="ja-JP" altLang="en-US" dirty="0"/>
+                        <a:t>最大値</a:t>
+                      </a:r>
+                    </a:p>
+                  </a:txBody>
+                  <a:tcPr/>
+                </a:tc>
+                <a:tc hMerge="1">
+                  <a:txBody>
+                    <a:bodyPr/>
+                    <a:lstStyle/>
+                    <a:p>
+                      <a:endParaRPr kumimoji="1" lang="ja-JP" altLang="en-US" dirty="0"/>
+                    </a:p>
+                  </a:txBody>
+                  <a:tcPr/>
+                </a:tc>
+                <a:tc gridSpan="2">
+                  <a:txBody>
+                    <a:bodyPr/>
+                    <a:lstStyle/>
+                    <a:p>
+                      <a:pPr algn="ctr"/>
+                      <a:r>
+                        <a:rPr kumimoji="1" lang="ja-JP" altLang="en-US" dirty="0"/>
+                        <a:t>標準偏差</a:t>
+                      </a:r>
+                    </a:p>
+                  </a:txBody>
+                  <a:tcPr/>
+                </a:tc>
+                <a:tc hMerge="1">
+                  <a:txBody>
+                    <a:bodyPr/>
+                    <a:lstStyle/>
+                    <a:p>
+                      <a:endParaRPr kumimoji="1" lang="ja-JP" altLang="en-US" dirty="0"/>
+                    </a:p>
+                  </a:txBody>
+                  <a:tcPr/>
+                </a:tc>
+                <a:tc gridSpan="2">
+                  <a:txBody>
+                    <a:bodyPr/>
+                    <a:lstStyle/>
+                    <a:p>
+                      <a:pPr algn="ctr"/>
+                      <a:r>
+                        <a:rPr kumimoji="1" lang="ja-JP" altLang="en-US" dirty="0"/>
+                        <a:t>中央値</a:t>
+                      </a:r>
+                    </a:p>
+                  </a:txBody>
+                  <a:tcPr/>
+                </a:tc>
+                <a:tc hMerge="1">
+                  <a:txBody>
+                    <a:bodyPr/>
+                    <a:lstStyle/>
+                    <a:p>
+                      <a:pPr algn="ctr"/>
+                      <a:endParaRPr kumimoji="1" lang="ja-JP" altLang="en-US" dirty="0"/>
+                    </a:p>
+                  </a:txBody>
+                  <a:tcPr/>
+                </a:tc>
+                <a:extLst>
+                  <a:ext uri="{0D108BD9-81ED-4DB2-BD59-A6C34878D82A}">
+                    <a16:rowId xmlns:a16="http://schemas.microsoft.com/office/drawing/2014/main" val="1833500485"/>
+                  </a:ext>
+                </a:extLst>
+              </a:tr>
+              <a:tr h="370840">
+                <a:tc vMerge="1">
+                  <a:txBody>
+                    <a:bodyPr/>
+                    <a:lstStyle/>
+                    <a:p>
+                      <a:endParaRPr kumimoji="1" lang="ja-JP" altLang="en-US" dirty="0"/>
+                    </a:p>
+                  </a:txBody>
+                  <a:tcPr/>
+                </a:tc>
+                <a:tc>
+                  <a:txBody>
+                    <a:bodyPr/>
+                    <a:lstStyle/>
+                    <a:p>
+                      <a:pPr algn="ctr"/>
+                      <a:r>
+                        <a:rPr kumimoji="1" lang="ja-JP" altLang="en-US" dirty="0"/>
+                        <a:t>感度</a:t>
+                      </a:r>
+                    </a:p>
+                  </a:txBody>
+                  <a:tcPr/>
+                </a:tc>
+                <a:tc>
+                  <a:txBody>
+                    <a:bodyPr/>
+                    <a:lstStyle/>
+                    <a:p>
+                      <a:pPr algn="ctr"/>
+                      <a:r>
+                        <a:rPr kumimoji="1" lang="ja-JP" altLang="en-US" dirty="0"/>
+                        <a:t>特異度</a:t>
+                      </a:r>
+                    </a:p>
+                  </a:txBody>
+                  <a:tcPr/>
+                </a:tc>
+                <a:tc>
+                  <a:txBody>
+                    <a:bodyPr/>
+                    <a:lstStyle/>
+                    <a:p>
+                      <a:pPr algn="ctr"/>
+                      <a:r>
+                        <a:rPr kumimoji="1" lang="ja-JP" altLang="en-US" dirty="0"/>
+                        <a:t>感度</a:t>
+                      </a:r>
+                    </a:p>
+                  </a:txBody>
+                  <a:tcPr/>
+                </a:tc>
+                <a:tc>
+                  <a:txBody>
+                    <a:bodyPr/>
+                    <a:lstStyle/>
+                    <a:p>
+                      <a:pPr algn="ctr"/>
+                      <a:r>
+                        <a:rPr kumimoji="1" lang="ja-JP" altLang="en-US" dirty="0"/>
+                        <a:t>特異度</a:t>
+                      </a:r>
+                    </a:p>
+                  </a:txBody>
+                  <a:tcPr/>
+                </a:tc>
+                <a:tc>
+                  <a:txBody>
+                    <a:bodyPr/>
+                    <a:lstStyle/>
+                    <a:p>
+                      <a:pPr algn="ctr"/>
+                      <a:r>
+                        <a:rPr kumimoji="1" lang="ja-JP" altLang="en-US" dirty="0"/>
+                        <a:t>感度</a:t>
+                      </a:r>
+                    </a:p>
+                  </a:txBody>
+                  <a:tcPr/>
+                </a:tc>
+                <a:tc>
+                  <a:txBody>
+                    <a:bodyPr/>
+                    <a:lstStyle/>
+                    <a:p>
+                      <a:pPr algn="ctr"/>
+                      <a:r>
+                        <a:rPr kumimoji="1" lang="ja-JP" altLang="en-US" dirty="0"/>
+                        <a:t>特異度</a:t>
+                      </a:r>
+                    </a:p>
+                  </a:txBody>
+                  <a:tcPr/>
+                </a:tc>
+                <a:tc>
+                  <a:txBody>
+                    <a:bodyPr/>
+                    <a:lstStyle/>
+                    <a:p>
+                      <a:pPr algn="ctr"/>
+                      <a:r>
+                        <a:rPr kumimoji="1" lang="ja-JP" altLang="en-US" dirty="0"/>
+                        <a:t>感度</a:t>
+                      </a:r>
+                    </a:p>
+                  </a:txBody>
+                  <a:tcPr/>
+                </a:tc>
+                <a:tc>
+                  <a:txBody>
+                    <a:bodyPr/>
+                    <a:lstStyle/>
+                    <a:p>
+                      <a:pPr algn="ctr"/>
+                      <a:r>
+                        <a:rPr kumimoji="1" lang="ja-JP" altLang="en-US" dirty="0"/>
+                        <a:t>特異度</a:t>
+                      </a:r>
+                    </a:p>
+                  </a:txBody>
+                  <a:tcPr/>
+                </a:tc>
+                <a:extLst>
+                  <a:ext uri="{0D108BD9-81ED-4DB2-BD59-A6C34878D82A}">
+                    <a16:rowId xmlns:a16="http://schemas.microsoft.com/office/drawing/2014/main" val="1059522432"/>
+                  </a:ext>
+                </a:extLst>
+              </a:tr>
+              <a:tr h="370840">
+                <a:tc>
+                  <a:txBody>
+                    <a:bodyPr/>
+                    <a:lstStyle/>
+                    <a:p>
+                      <a:r>
+                        <a:rPr kumimoji="1" lang="ja-JP" altLang="en-US" dirty="0"/>
+                        <a:t>質問</a:t>
+                      </a:r>
+                    </a:p>
+                  </a:txBody>
+                  <a:tcPr/>
+                </a:tc>
+                <a:tc>
+                  <a:txBody>
+                    <a:bodyPr/>
+                    <a:lstStyle/>
+                    <a:p>
+                      <a:pPr algn="ctr"/>
+                      <a:r>
+                        <a:rPr kumimoji="1" lang="en-US" altLang="ja-JP" dirty="0"/>
+                        <a:t>10.3</a:t>
+                      </a:r>
+                      <a:endParaRPr kumimoji="1" lang="ja-JP" altLang="en-US" dirty="0"/>
+                    </a:p>
+                  </a:txBody>
+                  <a:tcPr/>
+                </a:tc>
+                <a:tc>
+                  <a:txBody>
+                    <a:bodyPr/>
+                    <a:lstStyle/>
+                    <a:p>
+                      <a:pPr algn="ctr"/>
+                      <a:r>
+                        <a:rPr kumimoji="1" lang="en-US" altLang="ja-JP" dirty="0"/>
+                        <a:t>58.1</a:t>
+                      </a:r>
+                      <a:endParaRPr kumimoji="1" lang="ja-JP" altLang="en-US" dirty="0"/>
+                    </a:p>
+                  </a:txBody>
+                  <a:tcPr/>
+                </a:tc>
+                <a:tc>
+                  <a:txBody>
+                    <a:bodyPr/>
+                    <a:lstStyle/>
+                    <a:p>
+                      <a:pPr algn="ctr"/>
+                      <a:r>
+                        <a:rPr kumimoji="1" lang="en-US" altLang="ja-JP" dirty="0"/>
+                        <a:t>42.4</a:t>
+                      </a:r>
+                      <a:endParaRPr kumimoji="1" lang="ja-JP" altLang="en-US" dirty="0"/>
+                    </a:p>
+                  </a:txBody>
+                  <a:tcPr/>
+                </a:tc>
+                <a:tc>
+                  <a:txBody>
+                    <a:bodyPr/>
+                    <a:lstStyle/>
+                    <a:p>
+                      <a:pPr algn="ctr"/>
+                      <a:r>
+                        <a:rPr kumimoji="1" lang="en-US" altLang="ja-JP" dirty="0"/>
+                        <a:t>48.4</a:t>
+                      </a:r>
+                      <a:endParaRPr kumimoji="1" lang="ja-JP" altLang="en-US" dirty="0"/>
+                    </a:p>
+                  </a:txBody>
+                  <a:tcPr/>
+                </a:tc>
+                <a:tc>
+                  <a:txBody>
+                    <a:bodyPr/>
+                    <a:lstStyle/>
+                    <a:p>
+                      <a:pPr algn="ctr"/>
+                      <a:r>
+                        <a:rPr kumimoji="1" lang="en-US" altLang="ja-JP" dirty="0"/>
+                        <a:t>27.6</a:t>
+                      </a:r>
+                      <a:endParaRPr kumimoji="1" lang="ja-JP" altLang="en-US" dirty="0"/>
+                    </a:p>
+                  </a:txBody>
+                  <a:tcPr/>
+                </a:tc>
+                <a:tc>
+                  <a:txBody>
+                    <a:bodyPr/>
+                    <a:lstStyle/>
+                    <a:p>
+                      <a:pPr algn="ctr"/>
+                      <a:r>
+                        <a:rPr kumimoji="1" lang="en-US" altLang="ja-JP" dirty="0"/>
+                        <a:t>54.8</a:t>
+                      </a:r>
+                      <a:endParaRPr kumimoji="1" lang="ja-JP" altLang="en-US" dirty="0"/>
+                    </a:p>
+                  </a:txBody>
+                  <a:tcPr/>
+                </a:tc>
+                <a:tc>
+                  <a:txBody>
+                    <a:bodyPr/>
+                    <a:lstStyle/>
+                    <a:p>
+                      <a:pPr algn="ctr"/>
+                      <a:r>
+                        <a:rPr kumimoji="1" lang="en-US" altLang="ja-JP" dirty="0"/>
+                        <a:t>17.2</a:t>
+                      </a:r>
+                      <a:endParaRPr kumimoji="1" lang="ja-JP" altLang="en-US" dirty="0"/>
+                    </a:p>
+                  </a:txBody>
+                  <a:tcPr/>
+                </a:tc>
+                <a:tc>
+                  <a:txBody>
+                    <a:bodyPr/>
+                    <a:lstStyle/>
+                    <a:p>
+                      <a:pPr algn="ctr"/>
+                      <a:r>
+                        <a:rPr kumimoji="1" lang="en-US" altLang="ja-JP" dirty="0"/>
+                        <a:t>54.8</a:t>
+                      </a:r>
+                      <a:endParaRPr kumimoji="1" lang="ja-JP" altLang="en-US" dirty="0"/>
+                    </a:p>
+                  </a:txBody>
+                  <a:tcPr/>
+                </a:tc>
+                <a:extLst>
+                  <a:ext uri="{0D108BD9-81ED-4DB2-BD59-A6C34878D82A}">
+                    <a16:rowId xmlns:a16="http://schemas.microsoft.com/office/drawing/2014/main" val="1650068553"/>
+                  </a:ext>
+                </a:extLst>
+              </a:tr>
+              <a:tr h="370840">
+                <a:tc>
+                  <a:txBody>
+                    <a:bodyPr/>
+                    <a:lstStyle/>
+                    <a:p>
+                      <a:r>
+                        <a:rPr kumimoji="1" lang="ja-JP" altLang="en-US" dirty="0"/>
+                        <a:t>応答</a:t>
+                      </a:r>
+                    </a:p>
+                  </a:txBody>
+                  <a:tcPr/>
+                </a:tc>
+                <a:tc>
+                  <a:txBody>
+                    <a:bodyPr/>
+                    <a:lstStyle/>
+                    <a:p>
+                      <a:pPr algn="ctr"/>
+                      <a:r>
+                        <a:rPr kumimoji="1" lang="en-US" altLang="ja-JP" dirty="0"/>
+                        <a:t>24.1</a:t>
+                      </a:r>
+                      <a:endParaRPr kumimoji="1" lang="ja-JP" altLang="en-US" dirty="0"/>
+                    </a:p>
+                  </a:txBody>
+                  <a:tcPr/>
+                </a:tc>
+                <a:tc>
+                  <a:txBody>
+                    <a:bodyPr/>
+                    <a:lstStyle/>
+                    <a:p>
+                      <a:pPr algn="ctr"/>
+                      <a:r>
+                        <a:rPr kumimoji="1" lang="en-US" altLang="ja-JP" dirty="0"/>
+                        <a:t>48.4</a:t>
+                      </a:r>
+                      <a:endParaRPr kumimoji="1" lang="ja-JP" altLang="en-US" dirty="0"/>
+                    </a:p>
+                  </a:txBody>
+                  <a:tcPr/>
+                </a:tc>
+                <a:tc>
+                  <a:txBody>
+                    <a:bodyPr/>
+                    <a:lstStyle/>
+                    <a:p>
+                      <a:pPr algn="ctr"/>
+                      <a:r>
+                        <a:rPr kumimoji="1" lang="en-US" altLang="ja-JP" b="0" dirty="0"/>
+                        <a:t>31.0</a:t>
+                      </a:r>
+                      <a:endParaRPr kumimoji="1" lang="ja-JP" altLang="en-US" b="0" dirty="0"/>
+                    </a:p>
+                  </a:txBody>
+                  <a:tcPr/>
+                </a:tc>
+                <a:tc>
+                  <a:txBody>
+                    <a:bodyPr/>
+                    <a:lstStyle/>
+                    <a:p>
+                      <a:pPr algn="ctr"/>
+                      <a:r>
+                        <a:rPr kumimoji="1" lang="en-US" altLang="ja-JP" b="0" dirty="0"/>
+                        <a:t>58.0</a:t>
+                      </a:r>
+                      <a:endParaRPr kumimoji="1" lang="ja-JP" altLang="en-US" b="0" dirty="0"/>
+                    </a:p>
+                  </a:txBody>
+                  <a:tcPr/>
+                </a:tc>
+                <a:tc>
+                  <a:txBody>
+                    <a:bodyPr/>
+                    <a:lstStyle/>
+                    <a:p>
+                      <a:pPr algn="ctr"/>
+                      <a:r>
+                        <a:rPr kumimoji="1" lang="en-US" altLang="ja-JP" dirty="0"/>
+                        <a:t>41.4</a:t>
+                      </a:r>
+                      <a:endParaRPr kumimoji="1" lang="ja-JP" altLang="en-US" dirty="0"/>
+                    </a:p>
+                  </a:txBody>
+                  <a:tcPr/>
+                </a:tc>
+                <a:tc>
+                  <a:txBody>
+                    <a:bodyPr/>
+                    <a:lstStyle/>
+                    <a:p>
+                      <a:pPr algn="ctr"/>
+                      <a:r>
+                        <a:rPr kumimoji="1" lang="en-US" altLang="ja-JP" dirty="0"/>
+                        <a:t>67.7</a:t>
+                      </a:r>
+                      <a:endParaRPr kumimoji="1" lang="ja-JP" altLang="en-US" dirty="0"/>
+                    </a:p>
+                  </a:txBody>
+                  <a:tcPr/>
+                </a:tc>
+                <a:tc>
+                  <a:txBody>
+                    <a:bodyPr/>
+                    <a:lstStyle/>
+                    <a:p>
+                      <a:pPr algn="ctr"/>
+                      <a:r>
+                        <a:rPr kumimoji="1" lang="en-US" altLang="ja-JP" dirty="0"/>
+                        <a:t>27.6</a:t>
+                      </a:r>
+                      <a:endParaRPr kumimoji="1" lang="ja-JP" altLang="en-US" dirty="0"/>
+                    </a:p>
+                  </a:txBody>
+                  <a:tcPr/>
+                </a:tc>
+                <a:tc>
+                  <a:txBody>
+                    <a:bodyPr/>
+                    <a:lstStyle/>
+                    <a:p>
+                      <a:pPr algn="ctr"/>
+                      <a:r>
+                        <a:rPr kumimoji="1" lang="en-US" altLang="ja-JP" dirty="0"/>
+                        <a:t>48.4</a:t>
+                      </a:r>
+                      <a:endParaRPr kumimoji="1" lang="ja-JP" altLang="en-US" dirty="0"/>
+                    </a:p>
+                  </a:txBody>
+                  <a:tcPr/>
+                </a:tc>
+                <a:extLst>
+                  <a:ext uri="{0D108BD9-81ED-4DB2-BD59-A6C34878D82A}">
+                    <a16:rowId xmlns:a16="http://schemas.microsoft.com/office/drawing/2014/main" val="3464377031"/>
+                  </a:ext>
+                </a:extLst>
+              </a:tr>
+              <a:tr h="370840">
+                <a:tc>
+                  <a:txBody>
+                    <a:bodyPr/>
+                    <a:lstStyle/>
+                    <a:p>
+                      <a:r>
+                        <a:rPr kumimoji="1" lang="ja-JP" altLang="en-US" dirty="0"/>
+                        <a:t>質問応答</a:t>
+                      </a:r>
+                    </a:p>
+                  </a:txBody>
+                  <a:tcPr/>
+                </a:tc>
+                <a:tc>
+                  <a:txBody>
+                    <a:bodyPr/>
+                    <a:lstStyle/>
+                    <a:p>
+                      <a:pPr algn="ctr"/>
+                      <a:r>
+                        <a:rPr kumimoji="1" lang="en-US" altLang="ja-JP" dirty="0"/>
+                        <a:t>20.7</a:t>
+                      </a:r>
+                      <a:endParaRPr kumimoji="1" lang="ja-JP" altLang="en-US" dirty="0"/>
+                    </a:p>
+                  </a:txBody>
+                  <a:tcPr/>
+                </a:tc>
+                <a:tc>
+                  <a:txBody>
+                    <a:bodyPr/>
+                    <a:lstStyle/>
+                    <a:p>
+                      <a:pPr algn="ctr"/>
+                      <a:r>
+                        <a:rPr kumimoji="1" lang="en-US" altLang="ja-JP" dirty="0"/>
+                        <a:t>45.2</a:t>
+                      </a:r>
+                      <a:endParaRPr kumimoji="1" lang="ja-JP" altLang="en-US" dirty="0"/>
+                    </a:p>
+                  </a:txBody>
+                  <a:tcPr/>
+                </a:tc>
+                <a:tc>
+                  <a:txBody>
+                    <a:bodyPr/>
+                    <a:lstStyle/>
+                    <a:p>
+                      <a:pPr algn="ctr"/>
+                      <a:r>
+                        <a:rPr kumimoji="1" lang="en-US" altLang="ja-JP" dirty="0"/>
+                        <a:t>27.6</a:t>
+                      </a:r>
+                      <a:endParaRPr kumimoji="1" lang="ja-JP" altLang="en-US" dirty="0"/>
+                    </a:p>
+                  </a:txBody>
+                  <a:tcPr/>
+                </a:tc>
+                <a:tc>
+                  <a:txBody>
+                    <a:bodyPr/>
+                    <a:lstStyle/>
+                    <a:p>
+                      <a:pPr algn="ctr"/>
+                      <a:r>
+                        <a:rPr kumimoji="1" lang="en-US" altLang="ja-JP" dirty="0"/>
+                        <a:t>51.6</a:t>
+                      </a:r>
+                      <a:endParaRPr kumimoji="1" lang="ja-JP" altLang="en-US" dirty="0"/>
+                    </a:p>
+                  </a:txBody>
+                  <a:tcPr/>
+                </a:tc>
+                <a:tc>
+                  <a:txBody>
+                    <a:bodyPr/>
+                    <a:lstStyle/>
+                    <a:p>
+                      <a:pPr algn="ctr"/>
+                      <a:r>
+                        <a:rPr kumimoji="1" lang="en-US" altLang="ja-JP" dirty="0"/>
+                        <a:t>24.1</a:t>
+                      </a:r>
+                      <a:endParaRPr kumimoji="1" lang="ja-JP" altLang="en-US" dirty="0"/>
+                    </a:p>
+                  </a:txBody>
+                  <a:tcPr/>
+                </a:tc>
+                <a:tc>
+                  <a:txBody>
+                    <a:bodyPr/>
+                    <a:lstStyle/>
+                    <a:p>
+                      <a:pPr algn="ctr"/>
+                      <a:r>
+                        <a:rPr kumimoji="1" lang="en-US" altLang="ja-JP" dirty="0"/>
+                        <a:t>54.8</a:t>
+                      </a:r>
+                      <a:endParaRPr kumimoji="1" lang="ja-JP" altLang="en-US" dirty="0"/>
+                    </a:p>
+                  </a:txBody>
+                  <a:tcPr/>
+                </a:tc>
+                <a:tc>
+                  <a:txBody>
+                    <a:bodyPr/>
+                    <a:lstStyle/>
+                    <a:p>
+                      <a:pPr algn="ctr"/>
+                      <a:r>
+                        <a:rPr kumimoji="1" lang="en-US" altLang="ja-JP" dirty="0"/>
+                        <a:t>24.1</a:t>
+                      </a:r>
+                      <a:endParaRPr kumimoji="1" lang="ja-JP" altLang="en-US" dirty="0"/>
+                    </a:p>
+                  </a:txBody>
+                  <a:tcPr/>
+                </a:tc>
+                <a:tc>
+                  <a:txBody>
+                    <a:bodyPr/>
+                    <a:lstStyle/>
+                    <a:p>
+                      <a:pPr algn="ctr"/>
+                      <a:r>
+                        <a:rPr kumimoji="1" lang="en-US" altLang="ja-JP" dirty="0"/>
+                        <a:t>58.0</a:t>
+                      </a:r>
+                      <a:endParaRPr kumimoji="1" lang="ja-JP" altLang="en-US" dirty="0"/>
+                    </a:p>
+                  </a:txBody>
+                  <a:tcPr/>
+                </a:tc>
+                <a:extLst>
+                  <a:ext uri="{0D108BD9-81ED-4DB2-BD59-A6C34878D82A}">
+                    <a16:rowId xmlns:a16="http://schemas.microsoft.com/office/drawing/2014/main" val="2404300819"/>
+                  </a:ext>
+                </a:extLst>
+              </a:tr>
+            </a:tbl>
+          </a:graphicData>
+        </a:graphic>
+      </p:graphicFrame>
+      <p:sp>
+        <p:nvSpPr>
+          <p:cNvPr id="6" name="コンテンツ プレースホルダー 3">
+            <a:extLst>
+              <a:ext uri="{FF2B5EF4-FFF2-40B4-BE49-F238E27FC236}">
+                <a16:creationId xmlns:a16="http://schemas.microsoft.com/office/drawing/2014/main" id="{8895D8AC-0658-44EC-64CC-C80BCB4957B2}"/>
+              </a:ext>
+            </a:extLst>
+          </p:cNvPr>
+          <p:cNvSpPr txBox="1">
+            <a:spLocks/>
+          </p:cNvSpPr>
+          <p:nvPr/>
+        </p:nvSpPr>
+        <p:spPr>
+          <a:xfrm>
+            <a:off x="1096962" y="3919822"/>
+            <a:ext cx="10769455" cy="2408242"/>
+          </a:xfrm>
+          <a:prstGeom prst="rect">
+            <a:avLst/>
+          </a:prstGeom>
+        </p:spPr>
+        <p:txBody>
+          <a:bodyPr vert="horz" wrap="square" lIns="0" tIns="0" rIns="0" bIns="0" rtlCol="0">
+            <a:noAutofit/>
+          </a:bodyPr>
+          <a:lstStyle>
+            <a:lvl1pPr marL="0" indent="0" algn="l" defTabSz="914400" rtl="0" eaLnBrk="1" latinLnBrk="0" hangingPunct="1">
+              <a:lnSpc>
+                <a:spcPct val="120000"/>
+              </a:lnSpc>
+              <a:spcBef>
+                <a:spcPts val="0"/>
+              </a:spcBef>
+              <a:spcAft>
+                <a:spcPts val="300"/>
+              </a:spcAft>
+              <a:buFontTx/>
+              <a:buNone/>
+              <a:defRPr kumimoji="1" sz="2400" kern="1200">
+                <a:solidFill>
+                  <a:schemeClr val="tx1"/>
+                </a:solidFill>
+                <a:latin typeface="+mn-lt"/>
+                <a:ea typeface="+mn-ea"/>
+                <a:cs typeface="+mn-cs"/>
+              </a:defRPr>
+            </a:lvl1pPr>
+            <a:lvl2pPr marL="177800" indent="0" algn="l" defTabSz="914400" rtl="0" eaLnBrk="1" latinLnBrk="0" hangingPunct="1">
+              <a:lnSpc>
+                <a:spcPct val="120000"/>
+              </a:lnSpc>
+              <a:spcBef>
+                <a:spcPts val="0"/>
+              </a:spcBef>
+              <a:spcAft>
+                <a:spcPts val="300"/>
+              </a:spcAft>
+              <a:buFontTx/>
+              <a:buNone/>
+              <a:defRPr kumimoji="1" sz="2400" kern="1200">
+                <a:solidFill>
+                  <a:schemeClr val="tx1"/>
+                </a:solidFill>
+                <a:latin typeface="+mn-lt"/>
+                <a:ea typeface="+mn-ea"/>
+                <a:cs typeface="+mn-cs"/>
+              </a:defRPr>
+            </a:lvl2pPr>
+            <a:lvl3pPr marL="534988" indent="0" algn="l" defTabSz="914400" rtl="0" eaLnBrk="1" latinLnBrk="0" hangingPunct="1">
+              <a:lnSpc>
+                <a:spcPct val="120000"/>
+              </a:lnSpc>
+              <a:spcBef>
+                <a:spcPts val="0"/>
+              </a:spcBef>
+              <a:spcAft>
+                <a:spcPts val="300"/>
+              </a:spcAft>
+              <a:buFontTx/>
+              <a:buNone/>
+              <a:defRPr kumimoji="1" sz="2400" kern="1200">
+                <a:solidFill>
+                  <a:schemeClr val="tx1"/>
+                </a:solidFill>
+                <a:latin typeface="+mn-lt"/>
+                <a:ea typeface="+mn-ea"/>
+                <a:cs typeface="+mn-cs"/>
+              </a:defRPr>
+            </a:lvl3pPr>
+            <a:lvl4pPr marL="803275" indent="0" algn="l" defTabSz="914400" rtl="0" eaLnBrk="1" latinLnBrk="0" hangingPunct="1">
+              <a:lnSpc>
+                <a:spcPct val="120000"/>
+              </a:lnSpc>
+              <a:spcBef>
+                <a:spcPts val="0"/>
+              </a:spcBef>
+              <a:spcAft>
+                <a:spcPts val="300"/>
+              </a:spcAft>
+              <a:buFontTx/>
+              <a:buNone/>
+              <a:defRPr kumimoji="1" sz="2400" kern="1200">
+                <a:solidFill>
+                  <a:schemeClr val="tx1"/>
+                </a:solidFill>
+                <a:latin typeface="+mn-lt"/>
+                <a:ea typeface="+mn-ea"/>
+                <a:cs typeface="+mn-cs"/>
+              </a:defRPr>
+            </a:lvl4pPr>
+            <a:lvl5pPr marL="1081088" indent="0" algn="l" defTabSz="914400" rtl="0" eaLnBrk="1" latinLnBrk="0" hangingPunct="1">
+              <a:lnSpc>
+                <a:spcPct val="120000"/>
+              </a:lnSpc>
+              <a:spcBef>
+                <a:spcPts val="0"/>
+              </a:spcBef>
+              <a:spcAft>
+                <a:spcPts val="300"/>
+              </a:spcAft>
+              <a:buFontTx/>
+              <a:buNone/>
+              <a:defRPr kumimoji="1" sz="2400" kern="1200">
+                <a:solidFill>
+                  <a:schemeClr val="tx1"/>
+                </a:solidFill>
+                <a:latin typeface="+mn-lt"/>
+                <a:ea typeface="+mn-ea"/>
+                <a:cs typeface="+mn-cs"/>
+              </a:defRPr>
+            </a:lvl5pPr>
+            <a:lvl6pPr marL="2514600" indent="-228600" algn="l" defTabSz="914400" rtl="0" eaLnBrk="1" latinLnBrk="0" hangingPunct="1">
+              <a:lnSpc>
+                <a:spcPct val="90000"/>
+              </a:lnSpc>
+              <a:spcBef>
+                <a:spcPts val="500"/>
+              </a:spcBef>
+              <a:buFont typeface="Arial" panose="020B0604020202020204" pitchFamily="34" charset="0"/>
+              <a:buChar char="•"/>
+              <a:defRPr kumimoji="1" sz="1800" kern="1200">
+                <a:solidFill>
+                  <a:schemeClr val="tx1"/>
+                </a:solidFill>
+                <a:latin typeface="+mn-lt"/>
+                <a:ea typeface="+mn-ea"/>
+                <a:cs typeface="+mn-cs"/>
+              </a:defRPr>
+            </a:lvl6pPr>
+            <a:lvl7pPr marL="2971800" indent="-228600" algn="l" defTabSz="914400" rtl="0" eaLnBrk="1" latinLnBrk="0" hangingPunct="1">
+              <a:lnSpc>
+                <a:spcPct val="90000"/>
+              </a:lnSpc>
+              <a:spcBef>
+                <a:spcPts val="500"/>
+              </a:spcBef>
+              <a:buFont typeface="Arial" panose="020B0604020202020204" pitchFamily="34" charset="0"/>
+              <a:buChar char="•"/>
+              <a:defRPr kumimoji="1" sz="1800" kern="1200">
+                <a:solidFill>
+                  <a:schemeClr val="tx1"/>
+                </a:solidFill>
+                <a:latin typeface="+mn-lt"/>
+                <a:ea typeface="+mn-ea"/>
+                <a:cs typeface="+mn-cs"/>
+              </a:defRPr>
+            </a:lvl7pPr>
+            <a:lvl8pPr marL="3429000" indent="-228600" algn="l" defTabSz="914400" rtl="0" eaLnBrk="1" latinLnBrk="0" hangingPunct="1">
+              <a:lnSpc>
+                <a:spcPct val="90000"/>
+              </a:lnSpc>
+              <a:spcBef>
+                <a:spcPts val="500"/>
+              </a:spcBef>
+              <a:buFont typeface="Arial" panose="020B0604020202020204" pitchFamily="34" charset="0"/>
+              <a:buChar char="•"/>
+              <a:defRPr kumimoji="1" sz="1800" kern="1200">
+                <a:solidFill>
+                  <a:schemeClr val="tx1"/>
+                </a:solidFill>
+                <a:latin typeface="+mn-lt"/>
+                <a:ea typeface="+mn-ea"/>
+                <a:cs typeface="+mn-cs"/>
+              </a:defRPr>
+            </a:lvl8pPr>
+            <a:lvl9pPr marL="3886200" indent="-228600" algn="l" defTabSz="914400" rtl="0" eaLnBrk="1" latinLnBrk="0" hangingPunct="1">
+              <a:lnSpc>
+                <a:spcPct val="90000"/>
+              </a:lnSpc>
+              <a:spcBef>
+                <a:spcPts val="500"/>
+              </a:spcBef>
+              <a:buFont typeface="Arial" panose="020B0604020202020204" pitchFamily="34" charset="0"/>
+              <a:buChar char="•"/>
+              <a:defRPr kumimoji="1" sz="1800" kern="1200">
+                <a:solidFill>
+                  <a:schemeClr val="tx1"/>
+                </a:solidFill>
+                <a:latin typeface="+mn-lt"/>
+                <a:ea typeface="+mn-ea"/>
+                <a:cs typeface="+mn-cs"/>
+              </a:defRPr>
+            </a:lvl9pPr>
+          </a:lstStyle>
+          <a:p>
+            <a:pPr marL="463550" lvl="1" indent="-285750" fontAlgn="t">
               <a:buFont typeface="Arial" panose="020B0604020202020204" pitchFamily="34" charset="0"/>
               <a:buChar char="•"/>
             </a:pPr>
-            <a:endParaRPr lang="ja-JP" altLang="en-US" sz="2000" dirty="0"/>
-          </a:p>
-          <a:p>
-            <a:pPr lvl="1"/>
-            <a:endParaRPr lang="en-US" altLang="ja-JP" dirty="0"/>
-          </a:p>
-          <a:p>
+            <a:r>
+              <a:rPr lang="ja-JP" altLang="en-US" sz="1800" dirty="0"/>
+              <a:t>これまでの表情を使用した精度と比べて全体的に精度は下降傾向にある</a:t>
+            </a:r>
+            <a:endParaRPr lang="en-US" altLang="ja-JP" sz="1800" dirty="0"/>
+          </a:p>
+          <a:p>
+            <a:pPr marL="463550" lvl="1" indent="-285750" fontAlgn="t">
+              <a:buFont typeface="Arial" panose="020B0604020202020204" pitchFamily="34" charset="0"/>
+              <a:buChar char="•"/>
+            </a:pPr>
+            <a:r>
+              <a:rPr lang="ja-JP" altLang="en-US" sz="1800" dirty="0"/>
+              <a:t>特に感度は高くても</a:t>
+            </a:r>
+            <a:r>
+              <a:rPr lang="en-US" altLang="ja-JP" sz="1800" dirty="0"/>
+              <a:t>40</a:t>
+            </a:r>
+            <a:r>
+              <a:rPr lang="ja-JP" altLang="en-US" sz="1800" dirty="0"/>
+              <a:t>％程度と、今まで</a:t>
+            </a:r>
+            <a:r>
+              <a:rPr lang="en-US" altLang="ja-JP" sz="1800" dirty="0"/>
+              <a:t>50</a:t>
+            </a:r>
+            <a:r>
+              <a:rPr lang="ja-JP" altLang="en-US" sz="1800" dirty="0"/>
+              <a:t>～</a:t>
+            </a:r>
+            <a:r>
+              <a:rPr lang="en-US" altLang="ja-JP" sz="1800" dirty="0"/>
+              <a:t>6</a:t>
+            </a:r>
+            <a:r>
+              <a:rPr lang="ja-JP" altLang="en-US" sz="1800" dirty="0"/>
+              <a:t>０％程度あったものと比べても低い</a:t>
+            </a:r>
+            <a:endParaRPr lang="en-US" altLang="ja-JP" sz="1800" dirty="0"/>
+          </a:p>
+          <a:p>
+            <a:pPr marL="463550" lvl="1" indent="-285750" fontAlgn="t">
+              <a:buFont typeface="Arial" panose="020B0604020202020204" pitchFamily="34" charset="0"/>
+              <a:buChar char="•"/>
+            </a:pPr>
+            <a:r>
+              <a:rPr lang="ja-JP" altLang="en-US" sz="1800" dirty="0"/>
+              <a:t>先頭</a:t>
+            </a:r>
+            <a:r>
+              <a:rPr lang="en-US" altLang="ja-JP" sz="1800" dirty="0"/>
+              <a:t>30</a:t>
+            </a:r>
+            <a:r>
+              <a:rPr lang="ja-JP" altLang="en-US" sz="1800" dirty="0"/>
+              <a:t>フレームという条件を設けていたが、今回はそれを設けていない</a:t>
+            </a:r>
             <a:br>
-              <a:rPr lang="en-US" altLang="ja-JP" dirty="0"/>
+              <a:rPr lang="en-US" altLang="ja-JP" sz="1800" dirty="0"/>
             </a:br>
             <a:br>
-              <a:rPr lang="en-US" altLang="ja-JP" dirty="0"/>
+              <a:rPr lang="en-US" altLang="ja-JP" sz="1800" dirty="0"/>
             </a:br>
             <a:br>
               <a:rPr lang="en-US" altLang="ja-JP" sz="2000" dirty="0"/>
             </a:br>
-            <a:endParaRPr lang="en-US" altLang="ja-JP" sz="2000" dirty="0"/>
-          </a:p>
-          <a:p>
-            <a:pPr marL="520700" lvl="1" indent="-342900">
-              <a:buFont typeface="Arial" panose="020B0604020202020204" pitchFamily="34" charset="0"/>
-              <a:buChar char="•"/>
-            </a:pPr>
-            <a:endParaRPr lang="en-US" altLang="ja-JP" sz="2000" dirty="0"/>
-          </a:p>
-        </p:txBody>
-      </p:sp>
-      <p:sp>
-        <p:nvSpPr>
-          <p:cNvPr id="4" name="四角形: 角を丸くする 3">
-            <a:extLst>
-              <a:ext uri="{FF2B5EF4-FFF2-40B4-BE49-F238E27FC236}">
-                <a16:creationId xmlns:a16="http://schemas.microsoft.com/office/drawing/2014/main" id="{6148B275-1E52-5B9E-F102-82BE9E2FCC9D}"/>
-              </a:ext>
-            </a:extLst>
-          </p:cNvPr>
-          <p:cNvSpPr/>
-          <p:nvPr/>
-        </p:nvSpPr>
-        <p:spPr>
-          <a:xfrm>
-            <a:off x="4368800" y="1676400"/>
-            <a:ext cx="2760133" cy="502382"/>
-          </a:xfrm>
-          <a:prstGeom prst="roundRect">
-            <a:avLst/>
-          </a:prstGeom>
-          <a:solidFill>
-            <a:schemeClr val="accent4"/>
-          </a:solidFill>
-          <a:ln>
-            <a:noFill/>
-          </a:ln>
-        </p:spPr>
-        <p:style>
-          <a:lnRef idx="2">
-            <a:schemeClr val="accent1">
-              <a:shade val="50000"/>
-            </a:schemeClr>
-          </a:lnRef>
-          <a:fillRef idx="1">
-            <a:schemeClr val="accent1"/>
-          </a:fillRef>
-          <a:effectRef idx="0">
-            <a:schemeClr val="accent1"/>
-          </a:effectRef>
-          <a:fontRef idx="minor">
-            <a:schemeClr val="lt1"/>
-          </a:fontRef>
-        </p:style>
-        <p:txBody>
-          <a:bodyPr rtlCol="0" anchor="ctr"/>
-          <a:lstStyle/>
-          <a:p>
-            <a:pPr algn="ctr"/>
-            <a:endParaRPr kumimoji="1" lang="ja-JP" altLang="en-US"/>
+            <a:endParaRPr lang="ja-JP" altLang="en-US" sz="2000" dirty="0"/>
           </a:p>
         </p:txBody>
       </p:sp>
     </p:spTree>
     <p:extLst>
       <p:ext uri="{BB962C8B-B14F-4D97-AF65-F5344CB8AC3E}">
-        <p14:creationId xmlns:p14="http://schemas.microsoft.com/office/powerpoint/2010/main" val="4034476687"/>
+        <p14:creationId xmlns:p14="http://schemas.microsoft.com/office/powerpoint/2010/main" val="101252574"/>
       </p:ext>
     </p:extLst>
   </p:cSld>
